--- a/content/05-teaching-resources/slides/specialism/12-collaboration-risk-and-quality-assurance.pptx
+++ b/content/05-teaching-resources/slides/specialism/12-collaboration-risk-and-quality-assurance.pptx
@@ -14,6 +14,10 @@
     <p:sldId id="262" r:id="rId14"/>
     <p:sldId id="263" r:id="rId15"/>
     <p:sldId id="264" r:id="rId16"/>
+    <p:sldId id="265" r:id="rId17"/>
+    <p:sldId id="266" r:id="rId18"/>
+    <p:sldId id="267" r:id="rId19"/>
+    <p:sldId id="268" r:id="rId20"/>
   </p:sldIdLst>
   <p:sldSz cx="12191695" cy="6858000" type="screen4x3"/>
   <p:notesSz cx="6858000" cy="9144000"/>
@@ -510,7 +514,22 @@
           <a:lstStyle/>
           <a:p>
             <a:r>
-              <a:t>Give students a few minutes to answer on mini whiteboards or paper, then reveal the answers on the next slide.</a:t>
+              <a:t>Answers:</a:t>
+            </a:r>
+          </a:p>
+          <a:p>
+            <a:r>
+              <a:t>1. E.g. machining, mechanical handling, high-power work.</a:t>
+            </a:r>
+          </a:p>
+          <a:p>
+            <a:r>
+              <a:t>2. Stop, assess and seek advice.</a:t>
+            </a:r>
+          </a:p>
+          <a:p>
+            <a:r>
+              <a:t>3. By combining likelihood and impact.</a:t>
             </a:r>
           </a:p>
         </p:txBody>
@@ -580,7 +599,22 @@
           <a:lstStyle/>
           <a:p>
             <a:r>
-              <a:t>Talk through any answers the class found difficult.</a:t>
+              <a:t>Answers:</a:t>
+            </a:r>
+          </a:p>
+          <a:p>
+            <a:r>
+              <a:t>1. E.g. functional tests, measurement, visual inspection.</a:t>
+            </a:r>
+          </a:p>
+          <a:p>
+            <a:r>
+              <a:t>2. Quality, technical compliance and completeness.</a:t>
+            </a:r>
+          </a:p>
+          <a:p>
+            <a:r>
+              <a:t>3. E.g. Engineering Council, IMechE, IET.</a:t>
             </a:r>
           </a:p>
         </p:txBody>
@@ -606,6 +640,146 @@
 </file>
 
 <file path=ppt/notesSlides/notesSlide3.xml><?xml version="1.0" encoding="utf-8"?>
+<p:notes xmlns:a="http://schemas.openxmlformats.org/drawingml/2006/main" xmlns:p="http://schemas.openxmlformats.org/presentationml/2006/main" xmlns:r="http://schemas.openxmlformats.org/officeDocument/2006/relationships">
+  <p:cSld>
+    <p:spTree>
+      <p:nvGrpSpPr>
+        <p:cNvPr id="1" name=""/>
+        <p:cNvGrpSpPr/>
+        <p:nvPr/>
+      </p:nvGrpSpPr>
+      <p:grpSpPr>
+        <a:xfrm>
+          <a:off x="0" y="0"/>
+          <a:ext cx="0" cy="0"/>
+          <a:chOff x="0" y="0"/>
+          <a:chExt cx="0" cy="0"/>
+        </a:xfrm>
+      </p:grpSpPr>
+      <p:sp>
+        <p:nvSpPr>
+          <p:cNvPr id="2" name="Slide Image Placeholder 1"/>
+          <p:cNvSpPr>
+            <a:spLocks noGrp="1"/>
+          </p:cNvSpPr>
+          <p:nvPr>
+            <p:ph type="sldImg" idx="2"/>
+          </p:nvPr>
+        </p:nvSpPr>
+        <p:spPr/>
+      </p:sp>
+      <p:sp>
+        <p:nvSpPr>
+          <p:cNvPr id="3" name="Notes Placeholder 2"/>
+          <p:cNvSpPr>
+            <a:spLocks noGrp="1"/>
+          </p:cNvSpPr>
+          <p:nvPr>
+            <p:ph type="body" idx="3" sz="quarter"/>
+          </p:nvPr>
+        </p:nvSpPr>
+        <p:spPr/>
+        <p:txBody>
+          <a:bodyPr/>
+          <a:lstStyle/>
+          <a:p>
+            <a:r>
+              <a:t>Give students a few minutes to answer on mini whiteboards or paper, then reveal the answers on the next slide.</a:t>
+            </a:r>
+          </a:p>
+        </p:txBody>
+      </p:sp>
+      <p:sp>
+        <p:nvSpPr>
+          <p:cNvPr id="4" name="Slide Number Placeholder 3"/>
+          <p:cNvSpPr>
+            <a:spLocks noGrp="1"/>
+          </p:cNvSpPr>
+          <p:nvPr>
+            <p:ph type="sldNum" idx="5" sz="quarter"/>
+          </p:nvPr>
+        </p:nvSpPr>
+        <p:spPr/>
+      </p:sp>
+    </p:spTree>
+  </p:cSld>
+  <p:clrMapOvr>
+    <a:masterClrMapping/>
+  </p:clrMapOvr>
+</p:notes>
+</file>
+
+<file path=ppt/notesSlides/notesSlide4.xml><?xml version="1.0" encoding="utf-8"?>
+<p:notes xmlns:a="http://schemas.openxmlformats.org/drawingml/2006/main" xmlns:p="http://schemas.openxmlformats.org/presentationml/2006/main" xmlns:r="http://schemas.openxmlformats.org/officeDocument/2006/relationships">
+  <p:cSld>
+    <p:spTree>
+      <p:nvGrpSpPr>
+        <p:cNvPr id="1" name=""/>
+        <p:cNvGrpSpPr/>
+        <p:nvPr/>
+      </p:nvGrpSpPr>
+      <p:grpSpPr>
+        <a:xfrm>
+          <a:off x="0" y="0"/>
+          <a:ext cx="0" cy="0"/>
+          <a:chOff x="0" y="0"/>
+          <a:chExt cx="0" cy="0"/>
+        </a:xfrm>
+      </p:grpSpPr>
+      <p:sp>
+        <p:nvSpPr>
+          <p:cNvPr id="2" name="Slide Image Placeholder 1"/>
+          <p:cNvSpPr>
+            <a:spLocks noGrp="1"/>
+          </p:cNvSpPr>
+          <p:nvPr>
+            <p:ph type="sldImg" idx="2"/>
+          </p:nvPr>
+        </p:nvSpPr>
+        <p:spPr/>
+      </p:sp>
+      <p:sp>
+        <p:nvSpPr>
+          <p:cNvPr id="3" name="Notes Placeholder 2"/>
+          <p:cNvSpPr>
+            <a:spLocks noGrp="1"/>
+          </p:cNvSpPr>
+          <p:nvPr>
+            <p:ph type="body" idx="3" sz="quarter"/>
+          </p:nvPr>
+        </p:nvSpPr>
+        <p:spPr/>
+        <p:txBody>
+          <a:bodyPr/>
+          <a:lstStyle/>
+          <a:p>
+            <a:r>
+              <a:t>Talk through any answers the class found difficult.</a:t>
+            </a:r>
+          </a:p>
+        </p:txBody>
+      </p:sp>
+      <p:sp>
+        <p:nvSpPr>
+          <p:cNvPr id="4" name="Slide Number Placeholder 3"/>
+          <p:cNvSpPr>
+            <a:spLocks noGrp="1"/>
+          </p:cNvSpPr>
+          <p:nvPr>
+            <p:ph type="sldNum" idx="5" sz="quarter"/>
+          </p:nvPr>
+        </p:nvSpPr>
+        <p:spPr/>
+      </p:sp>
+    </p:spTree>
+  </p:cSld>
+  <p:clrMapOvr>
+    <a:masterClrMapping/>
+  </p:clrMapOvr>
+</p:notes>
+</file>
+
+<file path=ppt/notesSlides/notesSlide5.xml><?xml version="1.0" encoding="utf-8"?>
 <p:notes xmlns:a="http://schemas.openxmlformats.org/drawingml/2006/main" xmlns:p="http://schemas.openxmlformats.org/presentationml/2006/main" xmlns:r="http://schemas.openxmlformats.org/officeDocument/2006/relationships">
   <p:cSld>
     <p:spTree>
@@ -3975,6 +4149,2172 @@
 </p:sld>
 </file>
 
+<file path=ppt/slides/slide10.xml><?xml version="1.0" encoding="utf-8"?>
+<p:sld xmlns:a="http://schemas.openxmlformats.org/drawingml/2006/main" xmlns:p="http://schemas.openxmlformats.org/presentationml/2006/main" xmlns:r="http://schemas.openxmlformats.org/officeDocument/2006/relationships">
+  <p:cSld>
+    <p:bg>
+      <p:bgPr>
+        <a:solidFill>
+          <a:srgbClr val="FFFFFF"/>
+        </a:solidFill>
+        <a:effectLst/>
+      </p:bgPr>
+    </p:bg>
+    <p:spTree>
+      <p:nvGrpSpPr>
+        <p:cNvPr id="1" name=""/>
+        <p:cNvGrpSpPr/>
+        <p:nvPr/>
+      </p:nvGrpSpPr>
+      <p:grpSpPr/>
+      <p:sp>
+        <p:nvSpPr>
+          <p:cNvPr id="2" name="TextBox 1"/>
+          <p:cNvSpPr txBox="1"/>
+          <p:nvPr/>
+        </p:nvSpPr>
+        <p:spPr>
+          <a:xfrm>
+            <a:off x="548640" y="320040"/>
+            <a:ext cx="11094415" cy="274320"/>
+          </a:xfrm>
+          <a:prstGeom prst="rect">
+            <a:avLst/>
+          </a:prstGeom>
+          <a:noFill/>
+        </p:spPr>
+        <p:txBody>
+          <a:bodyPr wrap="square" anchor="t" lIns="0" rIns="0" tIns="0" bIns="0"/>
+          <a:lstStyle/>
+          <a:p>
+            <a:pPr algn="l"/>
+            <a:r>
+              <a:rPr sz="1100" b="1" i="0">
+                <a:solidFill>
+                  <a:srgbClr val="54595D"/>
+                </a:solidFill>
+                <a:latin typeface="Calibri"/>
+              </a:rPr>
+              <a:t>MECHANICAL ENGINEERING  ·  Mechanical: Performance Outcome 5</a:t>
+            </a:r>
+          </a:p>
+        </p:txBody>
+      </p:sp>
+      <p:sp>
+        <p:nvSpPr>
+          <p:cNvPr id="3" name="TextBox 2"/>
+          <p:cNvSpPr txBox="1"/>
+          <p:nvPr/>
+        </p:nvSpPr>
+        <p:spPr>
+          <a:xfrm>
+            <a:off x="548640" y="566928"/>
+            <a:ext cx="11094415" cy="822960"/>
+          </a:xfrm>
+          <a:prstGeom prst="rect">
+            <a:avLst/>
+          </a:prstGeom>
+          <a:noFill/>
+        </p:spPr>
+        <p:txBody>
+          <a:bodyPr wrap="square" anchor="ctr" lIns="0" rIns="0" tIns="0" bIns="0"/>
+          <a:lstStyle/>
+          <a:p>
+            <a:pPr algn="l"/>
+            <a:r>
+              <a:rPr sz="3200" b="1" i="0">
+                <a:solidFill>
+                  <a:srgbClr val="03306E"/>
+                </a:solidFill>
+                <a:latin typeface="Cambria"/>
+              </a:rPr>
+              <a:t>Check your understanding</a:t>
+            </a:r>
+          </a:p>
+        </p:txBody>
+      </p:sp>
+      <p:sp>
+        <p:nvSpPr>
+          <p:cNvPr id="4" name="TextBox 3"/>
+          <p:cNvSpPr txBox="1"/>
+          <p:nvPr/>
+        </p:nvSpPr>
+        <p:spPr>
+          <a:xfrm>
+            <a:off x="548640" y="6446520"/>
+            <a:ext cx="8229600" cy="274320"/>
+          </a:xfrm>
+          <a:prstGeom prst="rect">
+            <a:avLst/>
+          </a:prstGeom>
+          <a:noFill/>
+        </p:spPr>
+        <p:txBody>
+          <a:bodyPr wrap="square" anchor="t" lIns="0" rIns="0" tIns="0" bIns="0"/>
+          <a:lstStyle/>
+          <a:p>
+            <a:pPr algn="l"/>
+            <a:r>
+              <a:rPr sz="1000" b="0" i="0">
+                <a:solidFill>
+                  <a:srgbClr val="54595D"/>
+                </a:solidFill>
+                <a:latin typeface="Calibri"/>
+              </a:rPr>
+              <a:t>Design and Development for Engineering and Manufacturing T Level  ·  Collaboration, Risk and Quality Assurance</a:t>
+            </a:r>
+          </a:p>
+        </p:txBody>
+      </p:sp>
+      <p:sp>
+        <p:nvSpPr>
+          <p:cNvPr id="5" name="TextBox 4"/>
+          <p:cNvSpPr txBox="1"/>
+          <p:nvPr/>
+        </p:nvSpPr>
+        <p:spPr>
+          <a:xfrm>
+            <a:off x="10728655" y="6446520"/>
+            <a:ext cx="914400" cy="274320"/>
+          </a:xfrm>
+          <a:prstGeom prst="rect">
+            <a:avLst/>
+          </a:prstGeom>
+          <a:noFill/>
+        </p:spPr>
+        <p:txBody>
+          <a:bodyPr wrap="square" anchor="t" lIns="0" rIns="0" tIns="0" bIns="0"/>
+          <a:lstStyle/>
+          <a:p>
+            <a:pPr algn="r"/>
+            <a:r>
+              <a:rPr sz="1000" b="0" i="0">
+                <a:solidFill>
+                  <a:srgbClr val="54595D"/>
+                </a:solidFill>
+                <a:latin typeface="Calibri"/>
+              </a:rPr>
+              <a:t>10</a:t>
+            </a:r>
+          </a:p>
+        </p:txBody>
+      </p:sp>
+      <p:sp>
+        <p:nvSpPr>
+          <p:cNvPr id="6" name="Oval 5"/>
+          <p:cNvSpPr/>
+          <p:nvPr/>
+        </p:nvSpPr>
+        <p:spPr>
+          <a:xfrm>
+            <a:off x="548640" y="1618488"/>
+            <a:ext cx="411480" cy="411480"/>
+          </a:xfrm>
+          <a:prstGeom prst="ellipse">
+            <a:avLst/>
+          </a:prstGeom>
+          <a:solidFill>
+            <a:srgbClr val="E0463A"/>
+          </a:solidFill>
+          <a:ln>
+            <a:noFill/>
+          </a:ln>
+          <a:effectLst/>
+        </p:spPr>
+        <p:style>
+          <a:lnRef idx="1">
+            <a:schemeClr val="accent1"/>
+          </a:lnRef>
+          <a:fillRef idx="3">
+            <a:schemeClr val="accent1"/>
+          </a:fillRef>
+          <a:effectRef idx="2">
+            <a:schemeClr val="accent1"/>
+          </a:effectRef>
+          <a:fontRef idx="minor">
+            <a:schemeClr val="lt1"/>
+          </a:fontRef>
+        </p:style>
+        <p:txBody>
+          <a:bodyPr rtlCol="0" anchor="ctr" lIns="0" rIns="0" tIns="0" bIns="0"/>
+          <a:lstStyle/>
+          <a:p>
+            <a:pPr algn="ctr"/>
+            <a:r>
+              <a:rPr sz="1400" b="1">
+                <a:solidFill>
+                  <a:srgbClr val="FFFFFF"/>
+                </a:solidFill>
+                <a:latin typeface="Calibri"/>
+              </a:rPr>
+              <a:t>1</a:t>
+            </a:r>
+          </a:p>
+        </p:txBody>
+      </p:sp>
+      <p:sp>
+        <p:nvSpPr>
+          <p:cNvPr id="7" name="TextBox 6"/>
+          <p:cNvSpPr txBox="1"/>
+          <p:nvPr/>
+        </p:nvSpPr>
+        <p:spPr>
+          <a:xfrm>
+            <a:off x="1234440" y="1600200"/>
+            <a:ext cx="10408615" cy="1429512"/>
+          </a:xfrm>
+          <a:prstGeom prst="rect">
+            <a:avLst/>
+          </a:prstGeom>
+          <a:noFill/>
+        </p:spPr>
+        <p:txBody>
+          <a:bodyPr wrap="square" anchor="t" lIns="0" rIns="0" tIns="0" bIns="0"/>
+          <a:lstStyle/>
+          <a:p>
+            <a:pPr algn="l"/>
+            <a:r>
+              <a:rPr sz="2200" b="0" i="0">
+                <a:solidFill>
+                  <a:srgbClr val="202122"/>
+                </a:solidFill>
+                <a:latin typeface="Calibri"/>
+              </a:rPr>
+              <a:t>Name two professional engineering bodies.</a:t>
+            </a:r>
+          </a:p>
+        </p:txBody>
+      </p:sp>
+      <p:sp>
+        <p:nvSpPr>
+          <p:cNvPr id="8" name="Oval 7"/>
+          <p:cNvSpPr/>
+          <p:nvPr/>
+        </p:nvSpPr>
+        <p:spPr>
+          <a:xfrm>
+            <a:off x="548640" y="3212592"/>
+            <a:ext cx="411480" cy="411480"/>
+          </a:xfrm>
+          <a:prstGeom prst="ellipse">
+            <a:avLst/>
+          </a:prstGeom>
+          <a:solidFill>
+            <a:srgbClr val="E0463A"/>
+          </a:solidFill>
+          <a:ln>
+            <a:noFill/>
+          </a:ln>
+          <a:effectLst/>
+        </p:spPr>
+        <p:style>
+          <a:lnRef idx="1">
+            <a:schemeClr val="accent1"/>
+          </a:lnRef>
+          <a:fillRef idx="3">
+            <a:schemeClr val="accent1"/>
+          </a:fillRef>
+          <a:effectRef idx="2">
+            <a:schemeClr val="accent1"/>
+          </a:effectRef>
+          <a:fontRef idx="minor">
+            <a:schemeClr val="lt1"/>
+          </a:fontRef>
+        </p:style>
+        <p:txBody>
+          <a:bodyPr rtlCol="0" anchor="ctr" lIns="0" rIns="0" tIns="0" bIns="0"/>
+          <a:lstStyle/>
+          <a:p>
+            <a:pPr algn="ctr"/>
+            <a:r>
+              <a:rPr sz="1400" b="1">
+                <a:solidFill>
+                  <a:srgbClr val="FFFFFF"/>
+                </a:solidFill>
+                <a:latin typeface="Calibri"/>
+              </a:rPr>
+              <a:t>2</a:t>
+            </a:r>
+          </a:p>
+        </p:txBody>
+      </p:sp>
+      <p:sp>
+        <p:nvSpPr>
+          <p:cNvPr id="9" name="TextBox 8"/>
+          <p:cNvSpPr txBox="1"/>
+          <p:nvPr/>
+        </p:nvSpPr>
+        <p:spPr>
+          <a:xfrm>
+            <a:off x="1234440" y="3194304"/>
+            <a:ext cx="10408615" cy="1429512"/>
+          </a:xfrm>
+          <a:prstGeom prst="rect">
+            <a:avLst/>
+          </a:prstGeom>
+          <a:noFill/>
+        </p:spPr>
+        <p:txBody>
+          <a:bodyPr wrap="square" anchor="t" lIns="0" rIns="0" tIns="0" bIns="0"/>
+          <a:lstStyle/>
+          <a:p>
+            <a:pPr algn="l"/>
+            <a:r>
+              <a:rPr sz="2200" b="0" i="0">
+                <a:solidFill>
+                  <a:srgbClr val="202122"/>
+                </a:solidFill>
+                <a:latin typeface="Calibri"/>
+              </a:rPr>
+              <a:t>What should you do in an unfamiliar risky situation?</a:t>
+            </a:r>
+          </a:p>
+        </p:txBody>
+      </p:sp>
+      <p:sp>
+        <p:nvSpPr>
+          <p:cNvPr id="10" name="Oval 9"/>
+          <p:cNvSpPr/>
+          <p:nvPr/>
+        </p:nvSpPr>
+        <p:spPr>
+          <a:xfrm>
+            <a:off x="548640" y="4806695"/>
+            <a:ext cx="411480" cy="411480"/>
+          </a:xfrm>
+          <a:prstGeom prst="ellipse">
+            <a:avLst/>
+          </a:prstGeom>
+          <a:solidFill>
+            <a:srgbClr val="E0463A"/>
+          </a:solidFill>
+          <a:ln>
+            <a:noFill/>
+          </a:ln>
+          <a:effectLst/>
+        </p:spPr>
+        <p:style>
+          <a:lnRef idx="1">
+            <a:schemeClr val="accent1"/>
+          </a:lnRef>
+          <a:fillRef idx="3">
+            <a:schemeClr val="accent1"/>
+          </a:fillRef>
+          <a:effectRef idx="2">
+            <a:schemeClr val="accent1"/>
+          </a:effectRef>
+          <a:fontRef idx="minor">
+            <a:schemeClr val="lt1"/>
+          </a:fontRef>
+        </p:style>
+        <p:txBody>
+          <a:bodyPr rtlCol="0" anchor="ctr" lIns="0" rIns="0" tIns="0" bIns="0"/>
+          <a:lstStyle/>
+          <a:p>
+            <a:pPr algn="ctr"/>
+            <a:r>
+              <a:rPr sz="1400" b="1">
+                <a:solidFill>
+                  <a:srgbClr val="FFFFFF"/>
+                </a:solidFill>
+                <a:latin typeface="Calibri"/>
+              </a:rPr>
+              <a:t>3</a:t>
+            </a:r>
+          </a:p>
+        </p:txBody>
+      </p:sp>
+      <p:sp>
+        <p:nvSpPr>
+          <p:cNvPr id="11" name="TextBox 10"/>
+          <p:cNvSpPr txBox="1"/>
+          <p:nvPr/>
+        </p:nvSpPr>
+        <p:spPr>
+          <a:xfrm>
+            <a:off x="1234440" y="4788408"/>
+            <a:ext cx="10408615" cy="1429512"/>
+          </a:xfrm>
+          <a:prstGeom prst="rect">
+            <a:avLst/>
+          </a:prstGeom>
+          <a:noFill/>
+        </p:spPr>
+        <p:txBody>
+          <a:bodyPr wrap="square" anchor="t" lIns="0" rIns="0" tIns="0" bIns="0"/>
+          <a:lstStyle/>
+          <a:p>
+            <a:pPr algn="l"/>
+            <a:r>
+              <a:rPr sz="2200" b="0" i="0">
+                <a:solidFill>
+                  <a:srgbClr val="202122"/>
+                </a:solidFill>
+                <a:latin typeface="Calibri"/>
+              </a:rPr>
+              <a:t>What does quality assuring a drawing involve?</a:t>
+            </a:r>
+          </a:p>
+        </p:txBody>
+      </p:sp>
+    </p:spTree>
+  </p:cSld>
+  <p:clrMapOvr>
+    <a:masterClrMapping/>
+  </p:clrMapOvr>
+</p:sld>
+</file>
+
+<file path=ppt/slides/slide11.xml><?xml version="1.0" encoding="utf-8"?>
+<p:sld xmlns:a="http://schemas.openxmlformats.org/drawingml/2006/main" xmlns:p="http://schemas.openxmlformats.org/presentationml/2006/main" xmlns:r="http://schemas.openxmlformats.org/officeDocument/2006/relationships">
+  <p:cSld>
+    <p:bg>
+      <p:bgPr>
+        <a:solidFill>
+          <a:srgbClr val="FFFFFF"/>
+        </a:solidFill>
+        <a:effectLst/>
+      </p:bgPr>
+    </p:bg>
+    <p:spTree>
+      <p:nvGrpSpPr>
+        <p:cNvPr id="1" name=""/>
+        <p:cNvGrpSpPr/>
+        <p:nvPr/>
+      </p:nvGrpSpPr>
+      <p:grpSpPr/>
+      <p:sp>
+        <p:nvSpPr>
+          <p:cNvPr id="2" name="TextBox 1"/>
+          <p:cNvSpPr txBox="1"/>
+          <p:nvPr/>
+        </p:nvSpPr>
+        <p:spPr>
+          <a:xfrm>
+            <a:off x="548640" y="320040"/>
+            <a:ext cx="11094415" cy="274320"/>
+          </a:xfrm>
+          <a:prstGeom prst="rect">
+            <a:avLst/>
+          </a:prstGeom>
+          <a:noFill/>
+        </p:spPr>
+        <p:txBody>
+          <a:bodyPr wrap="square" anchor="t" lIns="0" rIns="0" tIns="0" bIns="0"/>
+          <a:lstStyle/>
+          <a:p>
+            <a:pPr algn="l"/>
+            <a:r>
+              <a:rPr sz="1100" b="1" i="0">
+                <a:solidFill>
+                  <a:srgbClr val="54595D"/>
+                </a:solidFill>
+                <a:latin typeface="Calibri"/>
+              </a:rPr>
+              <a:t>MECHANICAL ENGINEERING  ·  Mechanical: Performance Outcome 5</a:t>
+            </a:r>
+          </a:p>
+        </p:txBody>
+      </p:sp>
+      <p:sp>
+        <p:nvSpPr>
+          <p:cNvPr id="3" name="TextBox 2"/>
+          <p:cNvSpPr txBox="1"/>
+          <p:nvPr/>
+        </p:nvSpPr>
+        <p:spPr>
+          <a:xfrm>
+            <a:off x="548640" y="566928"/>
+            <a:ext cx="11094415" cy="822960"/>
+          </a:xfrm>
+          <a:prstGeom prst="rect">
+            <a:avLst/>
+          </a:prstGeom>
+          <a:noFill/>
+        </p:spPr>
+        <p:txBody>
+          <a:bodyPr wrap="square" anchor="ctr" lIns="0" rIns="0" tIns="0" bIns="0"/>
+          <a:lstStyle/>
+          <a:p>
+            <a:pPr algn="l"/>
+            <a:r>
+              <a:rPr sz="3200" b="1" i="0">
+                <a:solidFill>
+                  <a:srgbClr val="03306E"/>
+                </a:solidFill>
+                <a:latin typeface="Cambria"/>
+              </a:rPr>
+              <a:t>Answers</a:t>
+            </a:r>
+          </a:p>
+        </p:txBody>
+      </p:sp>
+      <p:sp>
+        <p:nvSpPr>
+          <p:cNvPr id="4" name="TextBox 3"/>
+          <p:cNvSpPr txBox="1"/>
+          <p:nvPr/>
+        </p:nvSpPr>
+        <p:spPr>
+          <a:xfrm>
+            <a:off x="548640" y="6446520"/>
+            <a:ext cx="8229600" cy="274320"/>
+          </a:xfrm>
+          <a:prstGeom prst="rect">
+            <a:avLst/>
+          </a:prstGeom>
+          <a:noFill/>
+        </p:spPr>
+        <p:txBody>
+          <a:bodyPr wrap="square" anchor="t" lIns="0" rIns="0" tIns="0" bIns="0"/>
+          <a:lstStyle/>
+          <a:p>
+            <a:pPr algn="l"/>
+            <a:r>
+              <a:rPr sz="1000" b="0" i="0">
+                <a:solidFill>
+                  <a:srgbClr val="54595D"/>
+                </a:solidFill>
+                <a:latin typeface="Calibri"/>
+              </a:rPr>
+              <a:t>Design and Development for Engineering and Manufacturing T Level  ·  Collaboration, Risk and Quality Assurance</a:t>
+            </a:r>
+          </a:p>
+        </p:txBody>
+      </p:sp>
+      <p:sp>
+        <p:nvSpPr>
+          <p:cNvPr id="5" name="TextBox 4"/>
+          <p:cNvSpPr txBox="1"/>
+          <p:nvPr/>
+        </p:nvSpPr>
+        <p:spPr>
+          <a:xfrm>
+            <a:off x="10728655" y="6446520"/>
+            <a:ext cx="914400" cy="274320"/>
+          </a:xfrm>
+          <a:prstGeom prst="rect">
+            <a:avLst/>
+          </a:prstGeom>
+          <a:noFill/>
+        </p:spPr>
+        <p:txBody>
+          <a:bodyPr wrap="square" anchor="t" lIns="0" rIns="0" tIns="0" bIns="0"/>
+          <a:lstStyle/>
+          <a:p>
+            <a:pPr algn="r"/>
+            <a:r>
+              <a:rPr sz="1000" b="0" i="0">
+                <a:solidFill>
+                  <a:srgbClr val="54595D"/>
+                </a:solidFill>
+                <a:latin typeface="Calibri"/>
+              </a:rPr>
+              <a:t>11</a:t>
+            </a:r>
+          </a:p>
+        </p:txBody>
+      </p:sp>
+      <p:sp>
+        <p:nvSpPr>
+          <p:cNvPr id="6" name="Oval 5"/>
+          <p:cNvSpPr/>
+          <p:nvPr/>
+        </p:nvSpPr>
+        <p:spPr>
+          <a:xfrm>
+            <a:off x="548640" y="1618488"/>
+            <a:ext cx="411480" cy="411480"/>
+          </a:xfrm>
+          <a:prstGeom prst="ellipse">
+            <a:avLst/>
+          </a:prstGeom>
+          <a:solidFill>
+            <a:srgbClr val="E0463A"/>
+          </a:solidFill>
+          <a:ln>
+            <a:noFill/>
+          </a:ln>
+          <a:effectLst/>
+        </p:spPr>
+        <p:style>
+          <a:lnRef idx="1">
+            <a:schemeClr val="accent1"/>
+          </a:lnRef>
+          <a:fillRef idx="3">
+            <a:schemeClr val="accent1"/>
+          </a:fillRef>
+          <a:effectRef idx="2">
+            <a:schemeClr val="accent1"/>
+          </a:effectRef>
+          <a:fontRef idx="minor">
+            <a:schemeClr val="lt1"/>
+          </a:fontRef>
+        </p:style>
+        <p:txBody>
+          <a:bodyPr rtlCol="0" anchor="ctr" lIns="0" rIns="0" tIns="0" bIns="0"/>
+          <a:lstStyle/>
+          <a:p>
+            <a:pPr algn="ctr"/>
+            <a:r>
+              <a:rPr sz="1400" b="1">
+                <a:solidFill>
+                  <a:srgbClr val="FFFFFF"/>
+                </a:solidFill>
+                <a:latin typeface="Calibri"/>
+              </a:rPr>
+              <a:t>1</a:t>
+            </a:r>
+          </a:p>
+        </p:txBody>
+      </p:sp>
+      <p:sp>
+        <p:nvSpPr>
+          <p:cNvPr id="7" name="TextBox 6"/>
+          <p:cNvSpPr txBox="1"/>
+          <p:nvPr/>
+        </p:nvSpPr>
+        <p:spPr>
+          <a:xfrm>
+            <a:off x="1234440" y="1600200"/>
+            <a:ext cx="10408615" cy="1429512"/>
+          </a:xfrm>
+          <a:prstGeom prst="rect">
+            <a:avLst/>
+          </a:prstGeom>
+          <a:noFill/>
+        </p:spPr>
+        <p:txBody>
+          <a:bodyPr wrap="square" anchor="t" lIns="0" rIns="0" tIns="0" bIns="0"/>
+          <a:lstStyle/>
+          <a:p>
+            <a:pPr algn="l"/>
+            <a:r>
+              <a:rPr sz="1800" b="0" i="0">
+                <a:solidFill>
+                  <a:srgbClr val="54595D"/>
+                </a:solidFill>
+                <a:latin typeface="Calibri"/>
+              </a:rPr>
+              <a:t>Name two professional engineering bodies.</a:t>
+            </a:r>
+          </a:p>
+          <a:p>
+            <a:r>
+              <a:rPr sz="1800" b="1">
+                <a:solidFill>
+                  <a:srgbClr val="03306E"/>
+                </a:solidFill>
+                <a:latin typeface="Calibri"/>
+              </a:rPr>
+              <a:t>Any two of: Engineering Council, IMechE, IET.</a:t>
+            </a:r>
+          </a:p>
+        </p:txBody>
+      </p:sp>
+      <p:sp>
+        <p:nvSpPr>
+          <p:cNvPr id="8" name="Oval 7"/>
+          <p:cNvSpPr/>
+          <p:nvPr/>
+        </p:nvSpPr>
+        <p:spPr>
+          <a:xfrm>
+            <a:off x="548640" y="3212592"/>
+            <a:ext cx="411480" cy="411480"/>
+          </a:xfrm>
+          <a:prstGeom prst="ellipse">
+            <a:avLst/>
+          </a:prstGeom>
+          <a:solidFill>
+            <a:srgbClr val="E0463A"/>
+          </a:solidFill>
+          <a:ln>
+            <a:noFill/>
+          </a:ln>
+          <a:effectLst/>
+        </p:spPr>
+        <p:style>
+          <a:lnRef idx="1">
+            <a:schemeClr val="accent1"/>
+          </a:lnRef>
+          <a:fillRef idx="3">
+            <a:schemeClr val="accent1"/>
+          </a:fillRef>
+          <a:effectRef idx="2">
+            <a:schemeClr val="accent1"/>
+          </a:effectRef>
+          <a:fontRef idx="minor">
+            <a:schemeClr val="lt1"/>
+          </a:fontRef>
+        </p:style>
+        <p:txBody>
+          <a:bodyPr rtlCol="0" anchor="ctr" lIns="0" rIns="0" tIns="0" bIns="0"/>
+          <a:lstStyle/>
+          <a:p>
+            <a:pPr algn="ctr"/>
+            <a:r>
+              <a:rPr sz="1400" b="1">
+                <a:solidFill>
+                  <a:srgbClr val="FFFFFF"/>
+                </a:solidFill>
+                <a:latin typeface="Calibri"/>
+              </a:rPr>
+              <a:t>2</a:t>
+            </a:r>
+          </a:p>
+        </p:txBody>
+      </p:sp>
+      <p:sp>
+        <p:nvSpPr>
+          <p:cNvPr id="9" name="TextBox 8"/>
+          <p:cNvSpPr txBox="1"/>
+          <p:nvPr/>
+        </p:nvSpPr>
+        <p:spPr>
+          <a:xfrm>
+            <a:off x="1234440" y="3194304"/>
+            <a:ext cx="10408615" cy="1429512"/>
+          </a:xfrm>
+          <a:prstGeom prst="rect">
+            <a:avLst/>
+          </a:prstGeom>
+          <a:noFill/>
+        </p:spPr>
+        <p:txBody>
+          <a:bodyPr wrap="square" anchor="t" lIns="0" rIns="0" tIns="0" bIns="0"/>
+          <a:lstStyle/>
+          <a:p>
+            <a:pPr algn="l"/>
+            <a:r>
+              <a:rPr sz="1800" b="0" i="0">
+                <a:solidFill>
+                  <a:srgbClr val="54595D"/>
+                </a:solidFill>
+                <a:latin typeface="Calibri"/>
+              </a:rPr>
+              <a:t>What should you do in an unfamiliar risky situation?</a:t>
+            </a:r>
+          </a:p>
+          <a:p>
+            <a:r>
+              <a:rPr sz="1800" b="1">
+                <a:solidFill>
+                  <a:srgbClr val="03306E"/>
+                </a:solidFill>
+                <a:latin typeface="Calibri"/>
+              </a:rPr>
+              <a:t>Stop, assess the risk and seek advice.</a:t>
+            </a:r>
+          </a:p>
+        </p:txBody>
+      </p:sp>
+      <p:sp>
+        <p:nvSpPr>
+          <p:cNvPr id="10" name="Oval 9"/>
+          <p:cNvSpPr/>
+          <p:nvPr/>
+        </p:nvSpPr>
+        <p:spPr>
+          <a:xfrm>
+            <a:off x="548640" y="4806695"/>
+            <a:ext cx="411480" cy="411480"/>
+          </a:xfrm>
+          <a:prstGeom prst="ellipse">
+            <a:avLst/>
+          </a:prstGeom>
+          <a:solidFill>
+            <a:srgbClr val="E0463A"/>
+          </a:solidFill>
+          <a:ln>
+            <a:noFill/>
+          </a:ln>
+          <a:effectLst/>
+        </p:spPr>
+        <p:style>
+          <a:lnRef idx="1">
+            <a:schemeClr val="accent1"/>
+          </a:lnRef>
+          <a:fillRef idx="3">
+            <a:schemeClr val="accent1"/>
+          </a:fillRef>
+          <a:effectRef idx="2">
+            <a:schemeClr val="accent1"/>
+          </a:effectRef>
+          <a:fontRef idx="minor">
+            <a:schemeClr val="lt1"/>
+          </a:fontRef>
+        </p:style>
+        <p:txBody>
+          <a:bodyPr rtlCol="0" anchor="ctr" lIns="0" rIns="0" tIns="0" bIns="0"/>
+          <a:lstStyle/>
+          <a:p>
+            <a:pPr algn="ctr"/>
+            <a:r>
+              <a:rPr sz="1400" b="1">
+                <a:solidFill>
+                  <a:srgbClr val="FFFFFF"/>
+                </a:solidFill>
+                <a:latin typeface="Calibri"/>
+              </a:rPr>
+              <a:t>3</a:t>
+            </a:r>
+          </a:p>
+        </p:txBody>
+      </p:sp>
+      <p:sp>
+        <p:nvSpPr>
+          <p:cNvPr id="11" name="TextBox 10"/>
+          <p:cNvSpPr txBox="1"/>
+          <p:nvPr/>
+        </p:nvSpPr>
+        <p:spPr>
+          <a:xfrm>
+            <a:off x="1234440" y="4788408"/>
+            <a:ext cx="10408615" cy="1429512"/>
+          </a:xfrm>
+          <a:prstGeom prst="rect">
+            <a:avLst/>
+          </a:prstGeom>
+          <a:noFill/>
+        </p:spPr>
+        <p:txBody>
+          <a:bodyPr wrap="square" anchor="t" lIns="0" rIns="0" tIns="0" bIns="0"/>
+          <a:lstStyle/>
+          <a:p>
+            <a:pPr algn="l"/>
+            <a:r>
+              <a:rPr sz="1800" b="0" i="0">
+                <a:solidFill>
+                  <a:srgbClr val="54595D"/>
+                </a:solidFill>
+                <a:latin typeface="Calibri"/>
+              </a:rPr>
+              <a:t>What does quality assuring a drawing involve?</a:t>
+            </a:r>
+          </a:p>
+          <a:p>
+            <a:r>
+              <a:rPr sz="1800" b="1">
+                <a:solidFill>
+                  <a:srgbClr val="03306E"/>
+                </a:solidFill>
+                <a:latin typeface="Calibri"/>
+              </a:rPr>
+              <a:t>Checking accuracy, technical compliance and completeness.</a:t>
+            </a:r>
+          </a:p>
+        </p:txBody>
+      </p:sp>
+    </p:spTree>
+  </p:cSld>
+  <p:clrMapOvr>
+    <a:masterClrMapping/>
+  </p:clrMapOvr>
+</p:sld>
+</file>
+
+<file path=ppt/slides/slide12.xml><?xml version="1.0" encoding="utf-8"?>
+<p:sld xmlns:a="http://schemas.openxmlformats.org/drawingml/2006/main" xmlns:p="http://schemas.openxmlformats.org/presentationml/2006/main" xmlns:r="http://schemas.openxmlformats.org/officeDocument/2006/relationships">
+  <p:cSld>
+    <p:bg>
+      <p:bgPr>
+        <a:solidFill>
+          <a:srgbClr val="FFFFFF"/>
+        </a:solidFill>
+        <a:effectLst/>
+      </p:bgPr>
+    </p:bg>
+    <p:spTree>
+      <p:nvGrpSpPr>
+        <p:cNvPr id="1" name=""/>
+        <p:cNvGrpSpPr/>
+        <p:nvPr/>
+      </p:nvGrpSpPr>
+      <p:grpSpPr/>
+      <p:sp>
+        <p:nvSpPr>
+          <p:cNvPr id="2" name="TextBox 1"/>
+          <p:cNvSpPr txBox="1"/>
+          <p:nvPr/>
+        </p:nvSpPr>
+        <p:spPr>
+          <a:xfrm>
+            <a:off x="548640" y="320040"/>
+            <a:ext cx="11094415" cy="274320"/>
+          </a:xfrm>
+          <a:prstGeom prst="rect">
+            <a:avLst/>
+          </a:prstGeom>
+          <a:noFill/>
+        </p:spPr>
+        <p:txBody>
+          <a:bodyPr wrap="square" anchor="t" lIns="0" rIns="0" tIns="0" bIns="0"/>
+          <a:lstStyle/>
+          <a:p>
+            <a:pPr algn="l"/>
+            <a:r>
+              <a:rPr sz="1100" b="1" i="0">
+                <a:solidFill>
+                  <a:srgbClr val="54595D"/>
+                </a:solidFill>
+                <a:latin typeface="Calibri"/>
+              </a:rPr>
+              <a:t>MECHANICAL ENGINEERING  ·  Mechanical: Performance Outcome 5</a:t>
+            </a:r>
+          </a:p>
+        </p:txBody>
+      </p:sp>
+      <p:sp>
+        <p:nvSpPr>
+          <p:cNvPr id="3" name="TextBox 2"/>
+          <p:cNvSpPr txBox="1"/>
+          <p:nvPr/>
+        </p:nvSpPr>
+        <p:spPr>
+          <a:xfrm>
+            <a:off x="548640" y="566928"/>
+            <a:ext cx="11094415" cy="822960"/>
+          </a:xfrm>
+          <a:prstGeom prst="rect">
+            <a:avLst/>
+          </a:prstGeom>
+          <a:noFill/>
+        </p:spPr>
+        <p:txBody>
+          <a:bodyPr wrap="square" anchor="ctr" lIns="0" rIns="0" tIns="0" bIns="0"/>
+          <a:lstStyle/>
+          <a:p>
+            <a:pPr algn="l"/>
+            <a:r>
+              <a:rPr sz="3200" b="1" i="0">
+                <a:solidFill>
+                  <a:srgbClr val="03306E"/>
+                </a:solidFill>
+                <a:latin typeface="Cambria"/>
+              </a:rPr>
+              <a:t>Activity: Peer check</a:t>
+            </a:r>
+          </a:p>
+        </p:txBody>
+      </p:sp>
+      <p:sp>
+        <p:nvSpPr>
+          <p:cNvPr id="4" name="TextBox 3"/>
+          <p:cNvSpPr txBox="1"/>
+          <p:nvPr/>
+        </p:nvSpPr>
+        <p:spPr>
+          <a:xfrm>
+            <a:off x="548640" y="6446520"/>
+            <a:ext cx="8229600" cy="274320"/>
+          </a:xfrm>
+          <a:prstGeom prst="rect">
+            <a:avLst/>
+          </a:prstGeom>
+          <a:noFill/>
+        </p:spPr>
+        <p:txBody>
+          <a:bodyPr wrap="square" anchor="t" lIns="0" rIns="0" tIns="0" bIns="0"/>
+          <a:lstStyle/>
+          <a:p>
+            <a:pPr algn="l"/>
+            <a:r>
+              <a:rPr sz="1000" b="0" i="0">
+                <a:solidFill>
+                  <a:srgbClr val="54595D"/>
+                </a:solidFill>
+                <a:latin typeface="Calibri"/>
+              </a:rPr>
+              <a:t>Design and Development for Engineering and Manufacturing T Level  ·  Collaboration, Risk and Quality Assurance</a:t>
+            </a:r>
+          </a:p>
+        </p:txBody>
+      </p:sp>
+      <p:sp>
+        <p:nvSpPr>
+          <p:cNvPr id="5" name="TextBox 4"/>
+          <p:cNvSpPr txBox="1"/>
+          <p:nvPr/>
+        </p:nvSpPr>
+        <p:spPr>
+          <a:xfrm>
+            <a:off x="10728655" y="6446520"/>
+            <a:ext cx="914400" cy="274320"/>
+          </a:xfrm>
+          <a:prstGeom prst="rect">
+            <a:avLst/>
+          </a:prstGeom>
+          <a:noFill/>
+        </p:spPr>
+        <p:txBody>
+          <a:bodyPr wrap="square" anchor="t" lIns="0" rIns="0" tIns="0" bIns="0"/>
+          <a:lstStyle/>
+          <a:p>
+            <a:pPr algn="r"/>
+            <a:r>
+              <a:rPr sz="1000" b="0" i="0">
+                <a:solidFill>
+                  <a:srgbClr val="54595D"/>
+                </a:solidFill>
+                <a:latin typeface="Calibri"/>
+              </a:rPr>
+              <a:t>12</a:t>
+            </a:r>
+          </a:p>
+        </p:txBody>
+      </p:sp>
+      <p:sp>
+        <p:nvSpPr>
+          <p:cNvPr id="6" name="Rounded Rectangle 5"/>
+          <p:cNvSpPr/>
+          <p:nvPr/>
+        </p:nvSpPr>
+        <p:spPr>
+          <a:xfrm>
+            <a:off x="548640" y="1508760"/>
+            <a:ext cx="2011680" cy="457200"/>
+          </a:xfrm>
+          <a:prstGeom prst="roundRect">
+            <a:avLst>
+              <a:gd name="adj" fmla="val 50000"/>
+            </a:avLst>
+          </a:prstGeom>
+          <a:solidFill>
+            <a:srgbClr val="E0463A"/>
+          </a:solidFill>
+          <a:ln>
+            <a:noFill/>
+          </a:ln>
+          <a:effectLst/>
+        </p:spPr>
+        <p:style>
+          <a:lnRef idx="1">
+            <a:schemeClr val="accent1"/>
+          </a:lnRef>
+          <a:fillRef idx="3">
+            <a:schemeClr val="accent1"/>
+          </a:fillRef>
+          <a:effectRef idx="2">
+            <a:schemeClr val="accent1"/>
+          </a:effectRef>
+          <a:fontRef idx="minor">
+            <a:schemeClr val="lt1"/>
+          </a:fontRef>
+        </p:style>
+        <p:txBody>
+          <a:bodyPr rtlCol="0" anchor="ctr"/>
+          <a:lstStyle/>
+          <a:p/>
+        </p:txBody>
+      </p:sp>
+      <p:sp>
+        <p:nvSpPr>
+          <p:cNvPr id="7" name="TextBox 6"/>
+          <p:cNvSpPr txBox="1"/>
+          <p:nvPr/>
+        </p:nvSpPr>
+        <p:spPr>
+          <a:xfrm>
+            <a:off x="548640" y="1508760"/>
+            <a:ext cx="2011680" cy="457200"/>
+          </a:xfrm>
+          <a:prstGeom prst="rect">
+            <a:avLst/>
+          </a:prstGeom>
+          <a:noFill/>
+        </p:spPr>
+        <p:txBody>
+          <a:bodyPr wrap="square" anchor="ctr" lIns="0" rIns="0" tIns="0" bIns="0"/>
+          <a:lstStyle/>
+          <a:p>
+            <a:pPr algn="ctr"/>
+            <a:r>
+              <a:rPr sz="1400" b="1" i="0">
+                <a:solidFill>
+                  <a:srgbClr val="FFFFFF"/>
+                </a:solidFill>
+                <a:latin typeface="Calibri"/>
+              </a:rPr>
+              <a:t>25 minutes</a:t>
+            </a:r>
+          </a:p>
+        </p:txBody>
+      </p:sp>
+      <p:sp>
+        <p:nvSpPr>
+          <p:cNvPr id="8" name="TextBox 7"/>
+          <p:cNvSpPr txBox="1"/>
+          <p:nvPr/>
+        </p:nvSpPr>
+        <p:spPr>
+          <a:xfrm>
+            <a:off x="2743200" y="1508760"/>
+            <a:ext cx="4754880" cy="457200"/>
+          </a:xfrm>
+          <a:prstGeom prst="rect">
+            <a:avLst/>
+          </a:prstGeom>
+          <a:noFill/>
+        </p:spPr>
+        <p:txBody>
+          <a:bodyPr wrap="square" anchor="ctr" lIns="0" rIns="0" tIns="0" bIns="0"/>
+          <a:lstStyle/>
+          <a:p>
+            <a:pPr algn="l"/>
+            <a:r>
+              <a:rPr sz="1400" b="0" i="1">
+                <a:solidFill>
+                  <a:srgbClr val="54595D"/>
+                </a:solidFill>
+                <a:latin typeface="Calibri"/>
+              </a:rPr>
+              <a:t>Pairs</a:t>
+            </a:r>
+          </a:p>
+        </p:txBody>
+      </p:sp>
+      <p:sp>
+        <p:nvSpPr>
+          <p:cNvPr id="9" name="Oval 8"/>
+          <p:cNvSpPr/>
+          <p:nvPr/>
+        </p:nvSpPr>
+        <p:spPr>
+          <a:xfrm>
+            <a:off x="548640" y="2482596"/>
+            <a:ext cx="384048" cy="384048"/>
+          </a:xfrm>
+          <a:prstGeom prst="ellipse">
+            <a:avLst/>
+          </a:prstGeom>
+          <a:solidFill>
+            <a:srgbClr val="0645AD"/>
+          </a:solidFill>
+          <a:ln>
+            <a:noFill/>
+          </a:ln>
+          <a:effectLst/>
+        </p:spPr>
+        <p:style>
+          <a:lnRef idx="1">
+            <a:schemeClr val="accent1"/>
+          </a:lnRef>
+          <a:fillRef idx="3">
+            <a:schemeClr val="accent1"/>
+          </a:fillRef>
+          <a:effectRef idx="2">
+            <a:schemeClr val="accent1"/>
+          </a:effectRef>
+          <a:fontRef idx="minor">
+            <a:schemeClr val="lt1"/>
+          </a:fontRef>
+        </p:style>
+        <p:txBody>
+          <a:bodyPr rtlCol="0" anchor="ctr" lIns="0" rIns="0" tIns="0" bIns="0"/>
+          <a:lstStyle/>
+          <a:p>
+            <a:pPr algn="ctr"/>
+            <a:r>
+              <a:rPr sz="1300" b="1">
+                <a:solidFill>
+                  <a:srgbClr val="FFFFFF"/>
+                </a:solidFill>
+                <a:latin typeface="Calibri"/>
+              </a:rPr>
+              <a:t>1</a:t>
+            </a:r>
+          </a:p>
+        </p:txBody>
+      </p:sp>
+      <p:sp>
+        <p:nvSpPr>
+          <p:cNvPr id="10" name="TextBox 9"/>
+          <p:cNvSpPr txBox="1"/>
+          <p:nvPr/>
+        </p:nvSpPr>
+        <p:spPr>
+          <a:xfrm>
+            <a:off x="1143000" y="2240280"/>
+            <a:ext cx="5943600" cy="868680"/>
+          </a:xfrm>
+          <a:prstGeom prst="rect">
+            <a:avLst/>
+          </a:prstGeom>
+          <a:noFill/>
+        </p:spPr>
+        <p:txBody>
+          <a:bodyPr wrap="square" anchor="ctr" lIns="0" rIns="0" tIns="0" bIns="0"/>
+          <a:lstStyle/>
+          <a:p>
+            <a:pPr algn="l"/>
+            <a:r>
+              <a:rPr sz="1700" b="0" i="0">
+                <a:solidFill>
+                  <a:srgbClr val="202122"/>
+                </a:solidFill>
+                <a:latin typeface="Calibri"/>
+              </a:rPr>
+              <a:t>Swap a drawing you produced with a partner.</a:t>
+            </a:r>
+          </a:p>
+        </p:txBody>
+      </p:sp>
+      <p:sp>
+        <p:nvSpPr>
+          <p:cNvPr id="11" name="Oval 10"/>
+          <p:cNvSpPr/>
+          <p:nvPr/>
+        </p:nvSpPr>
+        <p:spPr>
+          <a:xfrm>
+            <a:off x="548640" y="3461004"/>
+            <a:ext cx="384048" cy="384048"/>
+          </a:xfrm>
+          <a:prstGeom prst="ellipse">
+            <a:avLst/>
+          </a:prstGeom>
+          <a:solidFill>
+            <a:srgbClr val="0645AD"/>
+          </a:solidFill>
+          <a:ln>
+            <a:noFill/>
+          </a:ln>
+          <a:effectLst/>
+        </p:spPr>
+        <p:style>
+          <a:lnRef idx="1">
+            <a:schemeClr val="accent1"/>
+          </a:lnRef>
+          <a:fillRef idx="3">
+            <a:schemeClr val="accent1"/>
+          </a:fillRef>
+          <a:effectRef idx="2">
+            <a:schemeClr val="accent1"/>
+          </a:effectRef>
+          <a:fontRef idx="minor">
+            <a:schemeClr val="lt1"/>
+          </a:fontRef>
+        </p:style>
+        <p:txBody>
+          <a:bodyPr rtlCol="0" anchor="ctr" lIns="0" rIns="0" tIns="0" bIns="0"/>
+          <a:lstStyle/>
+          <a:p>
+            <a:pPr algn="ctr"/>
+            <a:r>
+              <a:rPr sz="1300" b="1">
+                <a:solidFill>
+                  <a:srgbClr val="FFFFFF"/>
+                </a:solidFill>
+                <a:latin typeface="Calibri"/>
+              </a:rPr>
+              <a:t>2</a:t>
+            </a:r>
+          </a:p>
+        </p:txBody>
+      </p:sp>
+      <p:sp>
+        <p:nvSpPr>
+          <p:cNvPr id="12" name="TextBox 11"/>
+          <p:cNvSpPr txBox="1"/>
+          <p:nvPr/>
+        </p:nvSpPr>
+        <p:spPr>
+          <a:xfrm>
+            <a:off x="1143000" y="3218688"/>
+            <a:ext cx="5943600" cy="868680"/>
+          </a:xfrm>
+          <a:prstGeom prst="rect">
+            <a:avLst/>
+          </a:prstGeom>
+          <a:noFill/>
+        </p:spPr>
+        <p:txBody>
+          <a:bodyPr wrap="square" anchor="ctr" lIns="0" rIns="0" tIns="0" bIns="0"/>
+          <a:lstStyle/>
+          <a:p>
+            <a:pPr algn="l"/>
+            <a:r>
+              <a:rPr sz="1700" b="0" i="0">
+                <a:solidFill>
+                  <a:srgbClr val="202122"/>
+                </a:solidFill>
+                <a:latin typeface="Calibri"/>
+              </a:rPr>
+              <a:t>Check it against a quality checklist.</a:t>
+            </a:r>
+          </a:p>
+        </p:txBody>
+      </p:sp>
+      <p:sp>
+        <p:nvSpPr>
+          <p:cNvPr id="13" name="Oval 12"/>
+          <p:cNvSpPr/>
+          <p:nvPr/>
+        </p:nvSpPr>
+        <p:spPr>
+          <a:xfrm>
+            <a:off x="548640" y="4439412"/>
+            <a:ext cx="384048" cy="384048"/>
+          </a:xfrm>
+          <a:prstGeom prst="ellipse">
+            <a:avLst/>
+          </a:prstGeom>
+          <a:solidFill>
+            <a:srgbClr val="0645AD"/>
+          </a:solidFill>
+          <a:ln>
+            <a:noFill/>
+          </a:ln>
+          <a:effectLst/>
+        </p:spPr>
+        <p:style>
+          <a:lnRef idx="1">
+            <a:schemeClr val="accent1"/>
+          </a:lnRef>
+          <a:fillRef idx="3">
+            <a:schemeClr val="accent1"/>
+          </a:fillRef>
+          <a:effectRef idx="2">
+            <a:schemeClr val="accent1"/>
+          </a:effectRef>
+          <a:fontRef idx="minor">
+            <a:schemeClr val="lt1"/>
+          </a:fontRef>
+        </p:style>
+        <p:txBody>
+          <a:bodyPr rtlCol="0" anchor="ctr" lIns="0" rIns="0" tIns="0" bIns="0"/>
+          <a:lstStyle/>
+          <a:p>
+            <a:pPr algn="ctr"/>
+            <a:r>
+              <a:rPr sz="1300" b="1">
+                <a:solidFill>
+                  <a:srgbClr val="FFFFFF"/>
+                </a:solidFill>
+                <a:latin typeface="Calibri"/>
+              </a:rPr>
+              <a:t>3</a:t>
+            </a:r>
+          </a:p>
+        </p:txBody>
+      </p:sp>
+      <p:sp>
+        <p:nvSpPr>
+          <p:cNvPr id="14" name="TextBox 13"/>
+          <p:cNvSpPr txBox="1"/>
+          <p:nvPr/>
+        </p:nvSpPr>
+        <p:spPr>
+          <a:xfrm>
+            <a:off x="1143000" y="4197096"/>
+            <a:ext cx="5943600" cy="868680"/>
+          </a:xfrm>
+          <a:prstGeom prst="rect">
+            <a:avLst/>
+          </a:prstGeom>
+          <a:noFill/>
+        </p:spPr>
+        <p:txBody>
+          <a:bodyPr wrap="square" anchor="ctr" lIns="0" rIns="0" tIns="0" bIns="0"/>
+          <a:lstStyle/>
+          <a:p>
+            <a:pPr algn="l"/>
+            <a:r>
+              <a:rPr sz="1700" b="0" i="0">
+                <a:solidFill>
+                  <a:srgbClr val="202122"/>
+                </a:solidFill>
+                <a:latin typeface="Calibri"/>
+              </a:rPr>
+              <a:t>Give feedback professionally.</a:t>
+            </a:r>
+          </a:p>
+        </p:txBody>
+      </p:sp>
+      <p:sp>
+        <p:nvSpPr>
+          <p:cNvPr id="15" name="Oval 14"/>
+          <p:cNvSpPr/>
+          <p:nvPr/>
+        </p:nvSpPr>
+        <p:spPr>
+          <a:xfrm>
+            <a:off x="548640" y="5417820"/>
+            <a:ext cx="384048" cy="384048"/>
+          </a:xfrm>
+          <a:prstGeom prst="ellipse">
+            <a:avLst/>
+          </a:prstGeom>
+          <a:solidFill>
+            <a:srgbClr val="0645AD"/>
+          </a:solidFill>
+          <a:ln>
+            <a:noFill/>
+          </a:ln>
+          <a:effectLst/>
+        </p:spPr>
+        <p:style>
+          <a:lnRef idx="1">
+            <a:schemeClr val="accent1"/>
+          </a:lnRef>
+          <a:fillRef idx="3">
+            <a:schemeClr val="accent1"/>
+          </a:fillRef>
+          <a:effectRef idx="2">
+            <a:schemeClr val="accent1"/>
+          </a:effectRef>
+          <a:fontRef idx="minor">
+            <a:schemeClr val="lt1"/>
+          </a:fontRef>
+        </p:style>
+        <p:txBody>
+          <a:bodyPr rtlCol="0" anchor="ctr" lIns="0" rIns="0" tIns="0" bIns="0"/>
+          <a:lstStyle/>
+          <a:p>
+            <a:pPr algn="ctr"/>
+            <a:r>
+              <a:rPr sz="1300" b="1">
+                <a:solidFill>
+                  <a:srgbClr val="FFFFFF"/>
+                </a:solidFill>
+                <a:latin typeface="Calibri"/>
+              </a:rPr>
+              <a:t>4</a:t>
+            </a:r>
+          </a:p>
+        </p:txBody>
+      </p:sp>
+      <p:sp>
+        <p:nvSpPr>
+          <p:cNvPr id="16" name="TextBox 15"/>
+          <p:cNvSpPr txBox="1"/>
+          <p:nvPr/>
+        </p:nvSpPr>
+        <p:spPr>
+          <a:xfrm>
+            <a:off x="1143000" y="5175504"/>
+            <a:ext cx="5943600" cy="868680"/>
+          </a:xfrm>
+          <a:prstGeom prst="rect">
+            <a:avLst/>
+          </a:prstGeom>
+          <a:noFill/>
+        </p:spPr>
+        <p:txBody>
+          <a:bodyPr wrap="square" anchor="ctr" lIns="0" rIns="0" tIns="0" bIns="0"/>
+          <a:lstStyle/>
+          <a:p>
+            <a:pPr algn="l"/>
+            <a:r>
+              <a:rPr sz="1700" b="0" i="0">
+                <a:solidFill>
+                  <a:srgbClr val="202122"/>
+                </a:solidFill>
+                <a:latin typeface="Calibri"/>
+              </a:rPr>
+              <a:t>Correct your own drawing from the feedback.</a:t>
+            </a:r>
+          </a:p>
+        </p:txBody>
+      </p:sp>
+      <p:sp>
+        <p:nvSpPr>
+          <p:cNvPr id="17" name="Rounded Rectangle 16"/>
+          <p:cNvSpPr/>
+          <p:nvPr/>
+        </p:nvSpPr>
+        <p:spPr>
+          <a:xfrm>
+            <a:off x="7772400" y="1508760"/>
+            <a:ext cx="3867912" cy="4572000"/>
+          </a:xfrm>
+          <a:prstGeom prst="roundRect">
+            <a:avLst>
+              <a:gd name="adj" fmla="val 8000"/>
+            </a:avLst>
+          </a:prstGeom>
+          <a:solidFill>
+            <a:srgbClr val="EAF3FF"/>
+          </a:solidFill>
+          <a:ln>
+            <a:noFill/>
+          </a:ln>
+          <a:effectLst/>
+        </p:spPr>
+        <p:style>
+          <a:lnRef idx="1">
+            <a:schemeClr val="accent1"/>
+          </a:lnRef>
+          <a:fillRef idx="3">
+            <a:schemeClr val="accent1"/>
+          </a:fillRef>
+          <a:effectRef idx="2">
+            <a:schemeClr val="accent1"/>
+          </a:effectRef>
+          <a:fontRef idx="minor">
+            <a:schemeClr val="lt1"/>
+          </a:fontRef>
+        </p:style>
+        <p:txBody>
+          <a:bodyPr rtlCol="0" anchor="ctr"/>
+          <a:lstStyle/>
+          <a:p/>
+        </p:txBody>
+      </p:sp>
+      <p:sp>
+        <p:nvSpPr>
+          <p:cNvPr id="18" name="TextBox 17"/>
+          <p:cNvSpPr txBox="1"/>
+          <p:nvPr/>
+        </p:nvSpPr>
+        <p:spPr>
+          <a:xfrm>
+            <a:off x="8046720" y="1737360"/>
+            <a:ext cx="3291840" cy="365760"/>
+          </a:xfrm>
+          <a:prstGeom prst="rect">
+            <a:avLst/>
+          </a:prstGeom>
+          <a:noFill/>
+        </p:spPr>
+        <p:txBody>
+          <a:bodyPr wrap="square" anchor="t" lIns="0" rIns="0" tIns="0" bIns="0"/>
+          <a:lstStyle/>
+          <a:p>
+            <a:pPr algn="l"/>
+            <a:r>
+              <a:rPr sz="1300" b="1" i="0">
+                <a:solidFill>
+                  <a:srgbClr val="0645AD"/>
+                </a:solidFill>
+                <a:latin typeface="Calibri"/>
+              </a:rPr>
+              <a:t>SUCCESS CRITERIA</a:t>
+            </a:r>
+          </a:p>
+        </p:txBody>
+      </p:sp>
+      <p:sp>
+        <p:nvSpPr>
+          <p:cNvPr id="19" name="TextBox 18"/>
+          <p:cNvSpPr txBox="1"/>
+          <p:nvPr/>
+        </p:nvSpPr>
+        <p:spPr>
+          <a:xfrm>
+            <a:off x="8046720" y="2240280"/>
+            <a:ext cx="3337560" cy="3657600"/>
+          </a:xfrm>
+          <a:prstGeom prst="rect">
+            <a:avLst/>
+          </a:prstGeom>
+          <a:noFill/>
+        </p:spPr>
+        <p:txBody>
+          <a:bodyPr wrap="square" lIns="0" rIns="0" tIns="0" bIns="0">
+            <a:spAutoFit/>
+          </a:bodyPr>
+          <a:lstStyle/>
+          <a:p>
+            <a:pPr marL="274320" indent="-274320">
+              <a:spcAft>
+                <a:spcPts val="810"/>
+              </a:spcAft>
+              <a:buClr>
+                <a:srgbClr val="0645AD"/>
+              </a:buClr>
+              <a:buFont typeface="Arial"/>
+              <a:buChar char="•"/>
+            </a:pPr>
+            <a:r>
+              <a:rPr sz="1800" b="0">
+                <a:solidFill>
+                  <a:srgbClr val="202122"/>
+                </a:solidFill>
+                <a:latin typeface="Calibri"/>
+              </a:rPr>
+              <a:t>Checklist fully used</a:t>
+            </a:r>
+          </a:p>
+          <a:p>
+            <a:pPr marL="274320" indent="-274320">
+              <a:spcAft>
+                <a:spcPts val="810"/>
+              </a:spcAft>
+              <a:buClr>
+                <a:srgbClr val="0645AD"/>
+              </a:buClr>
+              <a:buFont typeface="Arial"/>
+              <a:buChar char="•"/>
+            </a:pPr>
+            <a:r>
+              <a:rPr sz="1800" b="0">
+                <a:solidFill>
+                  <a:srgbClr val="202122"/>
+                </a:solidFill>
+                <a:latin typeface="Calibri"/>
+              </a:rPr>
+              <a:t>Feedback is constructive</a:t>
+            </a:r>
+          </a:p>
+          <a:p>
+            <a:pPr marL="274320" indent="-274320">
+              <a:spcAft>
+                <a:spcPts val="810"/>
+              </a:spcAft>
+              <a:buClr>
+                <a:srgbClr val="0645AD"/>
+              </a:buClr>
+              <a:buFont typeface="Arial"/>
+              <a:buChar char="•"/>
+            </a:pPr>
+            <a:r>
+              <a:rPr sz="1800" b="0">
+                <a:solidFill>
+                  <a:srgbClr val="202122"/>
+                </a:solidFill>
+                <a:latin typeface="Calibri"/>
+              </a:rPr>
+              <a:t>Corrections made</a:t>
+            </a:r>
+          </a:p>
+        </p:txBody>
+      </p:sp>
+    </p:spTree>
+  </p:cSld>
+  <p:clrMapOvr>
+    <a:masterClrMapping/>
+  </p:clrMapOvr>
+</p:sld>
+</file>
+
+<file path=ppt/slides/slide13.xml><?xml version="1.0" encoding="utf-8"?>
+<p:sld xmlns:a="http://schemas.openxmlformats.org/drawingml/2006/main" xmlns:p="http://schemas.openxmlformats.org/presentationml/2006/main" xmlns:r="http://schemas.openxmlformats.org/officeDocument/2006/relationships">
+  <p:cSld>
+    <p:bg>
+      <p:bgPr>
+        <a:solidFill>
+          <a:srgbClr val="03306E"/>
+        </a:solidFill>
+        <a:effectLst/>
+      </p:bgPr>
+    </p:bg>
+    <p:spTree>
+      <p:nvGrpSpPr>
+        <p:cNvPr id="1" name=""/>
+        <p:cNvGrpSpPr/>
+        <p:nvPr/>
+      </p:nvGrpSpPr>
+      <p:grpSpPr/>
+      <p:sp>
+        <p:nvSpPr>
+          <p:cNvPr id="2" name="TextBox 1"/>
+          <p:cNvSpPr txBox="1"/>
+          <p:nvPr/>
+        </p:nvSpPr>
+        <p:spPr>
+          <a:xfrm>
+            <a:off x="548640" y="320040"/>
+            <a:ext cx="11094415" cy="274320"/>
+          </a:xfrm>
+          <a:prstGeom prst="rect">
+            <a:avLst/>
+          </a:prstGeom>
+          <a:noFill/>
+        </p:spPr>
+        <p:txBody>
+          <a:bodyPr wrap="square" anchor="t" lIns="0" rIns="0" tIns="0" bIns="0"/>
+          <a:lstStyle/>
+          <a:p>
+            <a:pPr algn="l"/>
+            <a:r>
+              <a:rPr sz="1100" b="1" i="0">
+                <a:solidFill>
+                  <a:srgbClr val="A9C8F0"/>
+                </a:solidFill>
+                <a:latin typeface="Calibri"/>
+              </a:rPr>
+              <a:t>MECHANICAL ENGINEERING  ·  Mechanical: Performance Outcome 5</a:t>
+            </a:r>
+          </a:p>
+        </p:txBody>
+      </p:sp>
+      <p:sp>
+        <p:nvSpPr>
+          <p:cNvPr id="3" name="TextBox 2"/>
+          <p:cNvSpPr txBox="1"/>
+          <p:nvPr/>
+        </p:nvSpPr>
+        <p:spPr>
+          <a:xfrm>
+            <a:off x="548640" y="566928"/>
+            <a:ext cx="11094415" cy="822960"/>
+          </a:xfrm>
+          <a:prstGeom prst="rect">
+            <a:avLst/>
+          </a:prstGeom>
+          <a:noFill/>
+        </p:spPr>
+        <p:txBody>
+          <a:bodyPr wrap="square" anchor="ctr" lIns="0" rIns="0" tIns="0" bIns="0"/>
+          <a:lstStyle/>
+          <a:p>
+            <a:pPr algn="l"/>
+            <a:r>
+              <a:rPr sz="3200" b="1" i="0">
+                <a:solidFill>
+                  <a:srgbClr val="FFFFFF"/>
+                </a:solidFill>
+                <a:latin typeface="Cambria"/>
+              </a:rPr>
+              <a:t>Exit ticket</a:t>
+            </a:r>
+          </a:p>
+        </p:txBody>
+      </p:sp>
+      <p:sp>
+        <p:nvSpPr>
+          <p:cNvPr id="4" name="Oval 3"/>
+          <p:cNvSpPr/>
+          <p:nvPr/>
+        </p:nvSpPr>
+        <p:spPr>
+          <a:xfrm>
+            <a:off x="548640" y="1737360"/>
+            <a:ext cx="502920" cy="502920"/>
+          </a:xfrm>
+          <a:prstGeom prst="ellipse">
+            <a:avLst/>
+          </a:prstGeom>
+          <a:solidFill>
+            <a:srgbClr val="E0463A"/>
+          </a:solidFill>
+          <a:ln>
+            <a:noFill/>
+          </a:ln>
+          <a:effectLst/>
+        </p:spPr>
+        <p:style>
+          <a:lnRef idx="1">
+            <a:schemeClr val="accent1"/>
+          </a:lnRef>
+          <a:fillRef idx="3">
+            <a:schemeClr val="accent1"/>
+          </a:fillRef>
+          <a:effectRef idx="2">
+            <a:schemeClr val="accent1"/>
+          </a:effectRef>
+          <a:fontRef idx="minor">
+            <a:schemeClr val="lt1"/>
+          </a:fontRef>
+        </p:style>
+        <p:txBody>
+          <a:bodyPr rtlCol="0" anchor="ctr" lIns="0" rIns="0" tIns="0" bIns="0"/>
+          <a:lstStyle/>
+          <a:p>
+            <a:pPr algn="ctr"/>
+            <a:r>
+              <a:rPr sz="1700" b="1">
+                <a:solidFill>
+                  <a:srgbClr val="FFFFFF"/>
+                </a:solidFill>
+                <a:latin typeface="Calibri"/>
+              </a:rPr>
+              <a:t>1</a:t>
+            </a:r>
+          </a:p>
+        </p:txBody>
+      </p:sp>
+      <p:sp>
+        <p:nvSpPr>
+          <p:cNvPr id="5" name="TextBox 4"/>
+          <p:cNvSpPr txBox="1"/>
+          <p:nvPr/>
+        </p:nvSpPr>
+        <p:spPr>
+          <a:xfrm>
+            <a:off x="1325880" y="1645920"/>
+            <a:ext cx="6583680" cy="822960"/>
+          </a:xfrm>
+          <a:prstGeom prst="rect">
+            <a:avLst/>
+          </a:prstGeom>
+          <a:noFill/>
+        </p:spPr>
+        <p:txBody>
+          <a:bodyPr wrap="square" anchor="ctr" lIns="0" rIns="0" tIns="0" bIns="0"/>
+          <a:lstStyle/>
+          <a:p>
+            <a:pPr algn="l"/>
+            <a:r>
+              <a:rPr sz="2000" b="0" i="0">
+                <a:solidFill>
+                  <a:srgbClr val="FFFFFF"/>
+                </a:solidFill>
+                <a:latin typeface="Calibri"/>
+              </a:rPr>
+              <a:t>Why do professional standards matter?</a:t>
+            </a:r>
+          </a:p>
+        </p:txBody>
+      </p:sp>
+      <p:sp>
+        <p:nvSpPr>
+          <p:cNvPr id="6" name="Oval 5"/>
+          <p:cNvSpPr/>
+          <p:nvPr/>
+        </p:nvSpPr>
+        <p:spPr>
+          <a:xfrm>
+            <a:off x="548640" y="2697480"/>
+            <a:ext cx="502920" cy="502920"/>
+          </a:xfrm>
+          <a:prstGeom prst="ellipse">
+            <a:avLst/>
+          </a:prstGeom>
+          <a:solidFill>
+            <a:srgbClr val="E0463A"/>
+          </a:solidFill>
+          <a:ln>
+            <a:noFill/>
+          </a:ln>
+          <a:effectLst/>
+        </p:spPr>
+        <p:style>
+          <a:lnRef idx="1">
+            <a:schemeClr val="accent1"/>
+          </a:lnRef>
+          <a:fillRef idx="3">
+            <a:schemeClr val="accent1"/>
+          </a:fillRef>
+          <a:effectRef idx="2">
+            <a:schemeClr val="accent1"/>
+          </a:effectRef>
+          <a:fontRef idx="minor">
+            <a:schemeClr val="lt1"/>
+          </a:fontRef>
+        </p:style>
+        <p:txBody>
+          <a:bodyPr rtlCol="0" anchor="ctr" lIns="0" rIns="0" tIns="0" bIns="0"/>
+          <a:lstStyle/>
+          <a:p>
+            <a:pPr algn="ctr"/>
+            <a:r>
+              <a:rPr sz="1700" b="1">
+                <a:solidFill>
+                  <a:srgbClr val="FFFFFF"/>
+                </a:solidFill>
+                <a:latin typeface="Calibri"/>
+              </a:rPr>
+              <a:t>2</a:t>
+            </a:r>
+          </a:p>
+        </p:txBody>
+      </p:sp>
+      <p:sp>
+        <p:nvSpPr>
+          <p:cNvPr id="7" name="TextBox 6"/>
+          <p:cNvSpPr txBox="1"/>
+          <p:nvPr/>
+        </p:nvSpPr>
+        <p:spPr>
+          <a:xfrm>
+            <a:off x="1325880" y="2606040"/>
+            <a:ext cx="6583680" cy="822960"/>
+          </a:xfrm>
+          <a:prstGeom prst="rect">
+            <a:avLst/>
+          </a:prstGeom>
+          <a:noFill/>
+        </p:spPr>
+        <p:txBody>
+          <a:bodyPr wrap="square" anchor="ctr" lIns="0" rIns="0" tIns="0" bIns="0"/>
+          <a:lstStyle/>
+          <a:p>
+            <a:pPr algn="l"/>
+            <a:r>
+              <a:rPr sz="2000" b="0" i="0">
+                <a:solidFill>
+                  <a:srgbClr val="FFFFFF"/>
+                </a:solidFill>
+                <a:latin typeface="Calibri"/>
+              </a:rPr>
+              <a:t>What makes a good team member?</a:t>
+            </a:r>
+          </a:p>
+        </p:txBody>
+      </p:sp>
+      <p:sp>
+        <p:nvSpPr>
+          <p:cNvPr id="8" name="Oval 7"/>
+          <p:cNvSpPr/>
+          <p:nvPr/>
+        </p:nvSpPr>
+        <p:spPr>
+          <a:xfrm>
+            <a:off x="548640" y="3657600"/>
+            <a:ext cx="502920" cy="502920"/>
+          </a:xfrm>
+          <a:prstGeom prst="ellipse">
+            <a:avLst/>
+          </a:prstGeom>
+          <a:solidFill>
+            <a:srgbClr val="E0463A"/>
+          </a:solidFill>
+          <a:ln>
+            <a:noFill/>
+          </a:ln>
+          <a:effectLst/>
+        </p:spPr>
+        <p:style>
+          <a:lnRef idx="1">
+            <a:schemeClr val="accent1"/>
+          </a:lnRef>
+          <a:fillRef idx="3">
+            <a:schemeClr val="accent1"/>
+          </a:fillRef>
+          <a:effectRef idx="2">
+            <a:schemeClr val="accent1"/>
+          </a:effectRef>
+          <a:fontRef idx="minor">
+            <a:schemeClr val="lt1"/>
+          </a:fontRef>
+        </p:style>
+        <p:txBody>
+          <a:bodyPr rtlCol="0" anchor="ctr" lIns="0" rIns="0" tIns="0" bIns="0"/>
+          <a:lstStyle/>
+          <a:p>
+            <a:pPr algn="ctr"/>
+            <a:r>
+              <a:rPr sz="1700" b="1">
+                <a:solidFill>
+                  <a:srgbClr val="FFFFFF"/>
+                </a:solidFill>
+                <a:latin typeface="Calibri"/>
+              </a:rPr>
+              <a:t>3</a:t>
+            </a:r>
+          </a:p>
+        </p:txBody>
+      </p:sp>
+      <p:sp>
+        <p:nvSpPr>
+          <p:cNvPr id="9" name="TextBox 8"/>
+          <p:cNvSpPr txBox="1"/>
+          <p:nvPr/>
+        </p:nvSpPr>
+        <p:spPr>
+          <a:xfrm>
+            <a:off x="1325880" y="3566160"/>
+            <a:ext cx="6583680" cy="822960"/>
+          </a:xfrm>
+          <a:prstGeom prst="rect">
+            <a:avLst/>
+          </a:prstGeom>
+          <a:noFill/>
+        </p:spPr>
+        <p:txBody>
+          <a:bodyPr wrap="square" anchor="ctr" lIns="0" rIns="0" tIns="0" bIns="0"/>
+          <a:lstStyle/>
+          <a:p>
+            <a:pPr algn="l"/>
+            <a:r>
+              <a:rPr sz="2000" b="0" i="0">
+                <a:solidFill>
+                  <a:srgbClr val="FFFFFF"/>
+                </a:solidFill>
+                <a:latin typeface="Calibri"/>
+              </a:rPr>
+              <a:t>Name a high-power application risk.</a:t>
+            </a:r>
+          </a:p>
+        </p:txBody>
+      </p:sp>
+      <p:sp>
+        <p:nvSpPr>
+          <p:cNvPr id="10" name="Rounded Rectangle 9"/>
+          <p:cNvSpPr/>
+          <p:nvPr/>
+        </p:nvSpPr>
+        <p:spPr>
+          <a:xfrm>
+            <a:off x="8229600" y="1645920"/>
+            <a:ext cx="3410712" cy="2926080"/>
+          </a:xfrm>
+          <a:prstGeom prst="roundRect">
+            <a:avLst>
+              <a:gd name="adj" fmla="val 8000"/>
+            </a:avLst>
+          </a:prstGeom>
+          <a:solidFill>
+            <a:srgbClr val="0645AD"/>
+          </a:solidFill>
+          <a:ln>
+            <a:noFill/>
+          </a:ln>
+          <a:effectLst/>
+        </p:spPr>
+        <p:style>
+          <a:lnRef idx="1">
+            <a:schemeClr val="accent1"/>
+          </a:lnRef>
+          <a:fillRef idx="3">
+            <a:schemeClr val="accent1"/>
+          </a:fillRef>
+          <a:effectRef idx="2">
+            <a:schemeClr val="accent1"/>
+          </a:effectRef>
+          <a:fontRef idx="minor">
+            <a:schemeClr val="lt1"/>
+          </a:fontRef>
+        </p:style>
+        <p:txBody>
+          <a:bodyPr rtlCol="0" anchor="ctr"/>
+          <a:lstStyle/>
+          <a:p/>
+        </p:txBody>
+      </p:sp>
+      <p:sp>
+        <p:nvSpPr>
+          <p:cNvPr id="11" name="TextBox 10"/>
+          <p:cNvSpPr txBox="1"/>
+          <p:nvPr/>
+        </p:nvSpPr>
+        <p:spPr>
+          <a:xfrm>
+            <a:off x="8503920" y="1874519"/>
+            <a:ext cx="2926080" cy="365760"/>
+          </a:xfrm>
+          <a:prstGeom prst="rect">
+            <a:avLst/>
+          </a:prstGeom>
+          <a:noFill/>
+        </p:spPr>
+        <p:txBody>
+          <a:bodyPr wrap="square" anchor="t" lIns="0" rIns="0" tIns="0" bIns="0"/>
+          <a:lstStyle/>
+          <a:p>
+            <a:pPr algn="l"/>
+            <a:r>
+              <a:rPr sz="1300" b="1" i="0">
+                <a:solidFill>
+                  <a:srgbClr val="A9C8F0"/>
+                </a:solidFill>
+                <a:latin typeface="Calibri"/>
+              </a:rPr>
+              <a:t>REVISE THIS TOPIC</a:t>
+            </a:r>
+          </a:p>
+        </p:txBody>
+      </p:sp>
+      <p:sp>
+        <p:nvSpPr>
+          <p:cNvPr id="12" name="TextBox 11"/>
+          <p:cNvSpPr txBox="1"/>
+          <p:nvPr/>
+        </p:nvSpPr>
+        <p:spPr>
+          <a:xfrm>
+            <a:off x="8503920" y="2286000"/>
+            <a:ext cx="2926080" cy="548640"/>
+          </a:xfrm>
+          <a:prstGeom prst="rect">
+            <a:avLst/>
+          </a:prstGeom>
+          <a:noFill/>
+        </p:spPr>
+        <p:txBody>
+          <a:bodyPr wrap="square" anchor="t" lIns="0" rIns="0" tIns="0" bIns="0"/>
+          <a:lstStyle/>
+          <a:p>
+            <a:pPr algn="l"/>
+            <a:r>
+              <a:rPr sz="1400" b="0" i="0">
+                <a:solidFill>
+                  <a:srgbClr val="FFFFFF"/>
+                </a:solidFill>
+                <a:latin typeface="Calibri"/>
+              </a:rPr>
+              <a:t>Revision notes for this lesson are on the study wiki:</a:t>
+            </a:r>
+          </a:p>
+        </p:txBody>
+      </p:sp>
+      <p:sp>
+        <p:nvSpPr>
+          <p:cNvPr id="13" name="TextBox 12"/>
+          <p:cNvSpPr txBox="1"/>
+          <p:nvPr/>
+        </p:nvSpPr>
+        <p:spPr>
+          <a:xfrm>
+            <a:off x="8503920" y="2926080"/>
+            <a:ext cx="2926080" cy="1463040"/>
+          </a:xfrm>
+          <a:prstGeom prst="rect">
+            <a:avLst/>
+          </a:prstGeom>
+          <a:noFill/>
+        </p:spPr>
+        <p:txBody>
+          <a:bodyPr wrap="square" anchor="t" lIns="0" rIns="0" tIns="0" bIns="0"/>
+          <a:lstStyle/>
+          <a:p>
+            <a:pPr algn="l"/>
+            <a:r>
+              <a:rPr sz="2000" b="1" i="0">
+                <a:solidFill>
+                  <a:srgbClr val="FFFFFF"/>
+                </a:solidFill>
+                <a:latin typeface="Cambria"/>
+              </a:rPr>
+              <a:t>Practical Criteria</a:t>
+            </a:r>
+          </a:p>
+        </p:txBody>
+      </p:sp>
+      <p:sp>
+        <p:nvSpPr>
+          <p:cNvPr id="14" name="TextBox 13"/>
+          <p:cNvSpPr txBox="1"/>
+          <p:nvPr/>
+        </p:nvSpPr>
+        <p:spPr>
+          <a:xfrm>
+            <a:off x="548640" y="5669280"/>
+            <a:ext cx="11094415" cy="548640"/>
+          </a:xfrm>
+          <a:prstGeom prst="rect">
+            <a:avLst/>
+          </a:prstGeom>
+          <a:noFill/>
+        </p:spPr>
+        <p:txBody>
+          <a:bodyPr wrap="square" anchor="t" lIns="0" rIns="0" tIns="0" bIns="0"/>
+          <a:lstStyle/>
+          <a:p>
+            <a:pPr algn="l"/>
+            <a:r>
+              <a:rPr sz="1200" b="0" i="0">
+                <a:solidFill>
+                  <a:srgbClr val="A9C8F0"/>
+                </a:solidFill>
+                <a:latin typeface="Calibri"/>
+              </a:rPr>
+              <a:t>https://lana6478.github.io/T-level-Design-Development-Engineering-Manufacturing/#/02-occupational-specialism/02-practical-criteria.md</a:t>
+            </a:r>
+          </a:p>
+        </p:txBody>
+      </p:sp>
+    </p:spTree>
+  </p:cSld>
+  <p:clrMapOvr>
+    <a:masterClrMapping/>
+  </p:clrMapOvr>
+</p:sld>
+</file>
+
 <file path=ppt/slides/slide2.xml><?xml version="1.0" encoding="utf-8"?>
 <p:sld xmlns:a="http://schemas.openxmlformats.org/drawingml/2006/main" xmlns:p="http://schemas.openxmlformats.org/presentationml/2006/main" xmlns:r="http://schemas.openxmlformats.org/officeDocument/2006/relationships">
   <p:cSld>
@@ -5419,22 +7759,93 @@
       </p:sp>
       <p:sp>
         <p:nvSpPr>
-          <p:cNvPr id="6" name="Rounded Rectangle 5"/>
+          <p:cNvPr id="6" name="TextBox 5"/>
+          <p:cNvSpPr txBox="1"/>
+          <p:nvPr/>
+        </p:nvSpPr>
+        <p:spPr>
+          <a:xfrm>
+            <a:off x="548640" y="1554480"/>
+            <a:ext cx="6720840" cy="4617720"/>
+          </a:xfrm>
+          <a:prstGeom prst="rect">
+            <a:avLst/>
+          </a:prstGeom>
+          <a:noFill/>
+        </p:spPr>
+        <p:txBody>
+          <a:bodyPr wrap="square" lIns="0" rIns="0" tIns="0" bIns="0">
+            <a:spAutoFit/>
+          </a:bodyPr>
+          <a:lstStyle/>
+          <a:p>
+            <a:pPr>
+              <a:spcAft>
+                <a:spcPts val="1320"/>
+              </a:spcAft>
+            </a:pPr>
+            <a:r>
+              <a:rPr sz="2200" b="0">
+                <a:solidFill>
+                  <a:srgbClr val="202122"/>
+                </a:solidFill>
+                <a:latin typeface="Calibri"/>
+              </a:rPr>
+              <a:t>Engineers carry out risk management for their work, especially in machining, mechanical handling and high-power applications, identifying hazards and putting mitigation in place.</a:t>
+            </a:r>
+          </a:p>
+          <a:p>
+            <a:pPr>
+              <a:spcAft>
+                <a:spcPts val="1320"/>
+              </a:spcAft>
+            </a:pPr>
+            <a:r>
+              <a:rPr sz="2200" b="0">
+                <a:solidFill>
+                  <a:srgbClr val="202122"/>
+                </a:solidFill>
+                <a:latin typeface="Calibri"/>
+              </a:rPr>
+              <a:t>In unfamiliar situations, the right response is to stop, assess the risk and seek advice rather than carry on.</a:t>
+            </a:r>
+          </a:p>
+          <a:p>
+            <a:pPr>
+              <a:spcAft>
+                <a:spcPts val="1320"/>
+              </a:spcAft>
+            </a:pPr>
+            <a:r>
+              <a:rPr sz="2200" b="0">
+                <a:solidFill>
+                  <a:srgbClr val="202122"/>
+                </a:solidFill>
+                <a:latin typeface="Calibri"/>
+              </a:rPr>
+              <a:t>Commercial risks, such as missing a deadline or a supplier failing, are ranked using models that combine likelihood and impact, so the biggest are tackled first.</a:t>
+            </a:r>
+          </a:p>
+        </p:txBody>
+      </p:sp>
+      <p:sp>
+        <p:nvSpPr>
+          <p:cNvPr id="7" name="Rounded Rectangle 6"/>
           <p:cNvSpPr/>
           <p:nvPr/>
         </p:nvSpPr>
         <p:spPr>
           <a:xfrm>
-            <a:off x="548640" y="1600200"/>
-            <a:ext cx="5410047" cy="2148840"/>
+            <a:off x="7772400" y="1554480"/>
+            <a:ext cx="3867912" cy="4526280"/>
           </a:xfrm>
           <a:prstGeom prst="roundRect">
             <a:avLst>
-              <a:gd name="adj" fmla="val 6000"/>
+              <a:gd name="adj" fmla="val 8000"/>
             </a:avLst>
           </a:prstGeom>
           <a:solidFill>
-            <a:srgbClr val="EAF3FF"/>
+            <a:srgbClr val="03306E"/>
           </a:solidFill>
           <a:ln>
             <a:noFill/>
@@ -5463,14 +7874,14 @@
       </p:sp>
       <p:sp>
         <p:nvSpPr>
-          <p:cNvPr id="7" name="Oval 6"/>
+          <p:cNvPr id="8" name="Oval 7"/>
           <p:cNvSpPr/>
           <p:nvPr/>
         </p:nvSpPr>
         <p:spPr>
           <a:xfrm>
-            <a:off x="777240" y="1828800"/>
-            <a:ext cx="457200" cy="457200"/>
+            <a:off x="8046720" y="1828800"/>
+            <a:ext cx="548640" cy="548640"/>
           </a:xfrm>
           <a:prstGeom prst="ellipse">
             <a:avLst/>
@@ -5503,46 +7914,13 @@
           <a:p>
             <a:pPr algn="ctr"/>
             <a:r>
-              <a:rPr sz="1500" b="1">
+              <a:rPr sz="1300" b="1">
                 <a:solidFill>
                   <a:srgbClr val="FFFFFF"/>
                 </a:solidFill>
                 <a:latin typeface="Calibri"/>
               </a:rPr>
-              <a:t>1</a:t>
-            </a:r>
-          </a:p>
-        </p:txBody>
-      </p:sp>
-      <p:sp>
-        <p:nvSpPr>
-          <p:cNvPr id="8" name="TextBox 7"/>
-          <p:cNvSpPr txBox="1"/>
-          <p:nvPr/>
-        </p:nvSpPr>
-        <p:spPr>
-          <a:xfrm>
-            <a:off x="1371600" y="1801368"/>
-            <a:ext cx="4404207" cy="512064"/>
-          </a:xfrm>
-          <a:prstGeom prst="rect">
-            <a:avLst/>
-          </a:prstGeom>
-          <a:noFill/>
-        </p:spPr>
-        <p:txBody>
-          <a:bodyPr wrap="square" anchor="ctr" lIns="0" rIns="0" tIns="0" bIns="0"/>
-          <a:lstStyle/>
-          <a:p>
-            <a:pPr algn="l"/>
-            <a:r>
-              <a:rPr sz="1900" b="1" i="0">
-                <a:solidFill>
-                  <a:srgbClr val="03306E"/>
-                </a:solidFill>
-                <a:latin typeface="Calibri"/>
-              </a:rPr>
-              <a:t>Contexts</a:t>
+              <a:t>e.g.</a:t>
             </a:r>
           </a:p>
         </p:txBody>
@@ -5555,8 +7933,8 @@
         </p:nvSpPr>
         <p:spPr>
           <a:xfrm>
-            <a:off x="777240" y="2468880"/>
-            <a:ext cx="4952847" cy="1143000"/>
+            <a:off x="8046720" y="2560320"/>
+            <a:ext cx="3291840" cy="365760"/>
           </a:xfrm>
           <a:prstGeom prst="rect">
             <a:avLst/>
@@ -5569,502 +7947,46 @@
           <a:p>
             <a:pPr algn="l"/>
             <a:r>
-              <a:rPr sz="2000" b="0" i="0">
-                <a:solidFill>
-                  <a:srgbClr val="202122"/>
-                </a:solidFill>
-                <a:latin typeface="Calibri"/>
-              </a:rPr>
-              <a:t>Machining, mechanical handling, high-power applications.</a:t>
-            </a:r>
-          </a:p>
-        </p:txBody>
-      </p:sp>
-      <p:sp>
-        <p:nvSpPr>
-          <p:cNvPr id="10" name="Rounded Rectangle 9"/>
-          <p:cNvSpPr/>
-          <p:nvPr/>
-        </p:nvSpPr>
-        <p:spPr>
-          <a:xfrm>
-            <a:off x="6233007" y="1600200"/>
-            <a:ext cx="5410047" cy="2148840"/>
-          </a:xfrm>
-          <a:prstGeom prst="roundRect">
-            <a:avLst>
-              <a:gd name="adj" fmla="val 6000"/>
-            </a:avLst>
-          </a:prstGeom>
-          <a:solidFill>
-            <a:srgbClr val="EAF3FF"/>
-          </a:solidFill>
-          <a:ln>
-            <a:noFill/>
-          </a:ln>
-          <a:effectLst/>
-        </p:spPr>
-        <p:style>
-          <a:lnRef idx="1">
-            <a:schemeClr val="accent1"/>
-          </a:lnRef>
-          <a:fillRef idx="3">
-            <a:schemeClr val="accent1"/>
-          </a:fillRef>
-          <a:effectRef idx="2">
-            <a:schemeClr val="accent1"/>
-          </a:effectRef>
-          <a:fontRef idx="minor">
-            <a:schemeClr val="lt1"/>
-          </a:fontRef>
-        </p:style>
-        <p:txBody>
-          <a:bodyPr rtlCol="0" anchor="ctr"/>
-          <a:lstStyle/>
-          <a:p/>
-        </p:txBody>
-      </p:sp>
-      <p:sp>
-        <p:nvSpPr>
-          <p:cNvPr id="11" name="Oval 10"/>
-          <p:cNvSpPr/>
-          <p:nvPr/>
-        </p:nvSpPr>
-        <p:spPr>
-          <a:xfrm>
-            <a:off x="6461607" y="1828800"/>
-            <a:ext cx="457200" cy="457200"/>
-          </a:xfrm>
-          <a:prstGeom prst="ellipse">
-            <a:avLst/>
-          </a:prstGeom>
-          <a:solidFill>
-            <a:srgbClr val="E0463A"/>
-          </a:solidFill>
-          <a:ln>
-            <a:noFill/>
-          </a:ln>
-          <a:effectLst/>
-        </p:spPr>
-        <p:style>
-          <a:lnRef idx="1">
-            <a:schemeClr val="accent1"/>
-          </a:lnRef>
-          <a:fillRef idx="3">
-            <a:schemeClr val="accent1"/>
-          </a:fillRef>
-          <a:effectRef idx="2">
-            <a:schemeClr val="accent1"/>
-          </a:effectRef>
-          <a:fontRef idx="minor">
-            <a:schemeClr val="lt1"/>
-          </a:fontRef>
-        </p:style>
-        <p:txBody>
-          <a:bodyPr rtlCol="0" anchor="ctr" lIns="0" rIns="0" tIns="0" bIns="0"/>
-          <a:lstStyle/>
-          <a:p>
-            <a:pPr algn="ctr"/>
-            <a:r>
-              <a:rPr sz="1500" b="1">
+              <a:rPr sz="1300" b="1" i="0">
+                <a:solidFill>
+                  <a:srgbClr val="A9C8F0"/>
+                </a:solidFill>
+                <a:latin typeface="Calibri"/>
+              </a:rPr>
+              <a:t>EXAMPLE</a:t>
+            </a:r>
+          </a:p>
+        </p:txBody>
+      </p:sp>
+      <p:sp>
+        <p:nvSpPr>
+          <p:cNvPr id="10" name="TextBox 9"/>
+          <p:cNvSpPr txBox="1"/>
+          <p:nvPr/>
+        </p:nvSpPr>
+        <p:spPr>
+          <a:xfrm>
+            <a:off x="8046720" y="2971800"/>
+            <a:ext cx="3291840" cy="2971800"/>
+          </a:xfrm>
+          <a:prstGeom prst="rect">
+            <a:avLst/>
+          </a:prstGeom>
+          <a:noFill/>
+        </p:spPr>
+        <p:txBody>
+          <a:bodyPr wrap="square" anchor="t" lIns="0" rIns="0" tIns="0" bIns="0"/>
+          <a:lstStyle/>
+          <a:p>
+            <a:pPr algn="l"/>
+            <a:r>
+              <a:rPr sz="1900" b="0" i="0">
                 <a:solidFill>
                   <a:srgbClr val="FFFFFF"/>
                 </a:solidFill>
-                <a:latin typeface="Calibri"/>
-              </a:rPr>
-              <a:t>2</a:t>
-            </a:r>
-          </a:p>
-        </p:txBody>
-      </p:sp>
-      <p:sp>
-        <p:nvSpPr>
-          <p:cNvPr id="12" name="TextBox 11"/>
-          <p:cNvSpPr txBox="1"/>
-          <p:nvPr/>
-        </p:nvSpPr>
-        <p:spPr>
-          <a:xfrm>
-            <a:off x="7055967" y="1801368"/>
-            <a:ext cx="4404207" cy="512064"/>
-          </a:xfrm>
-          <a:prstGeom prst="rect">
-            <a:avLst/>
-          </a:prstGeom>
-          <a:noFill/>
-        </p:spPr>
-        <p:txBody>
-          <a:bodyPr wrap="square" anchor="ctr" lIns="0" rIns="0" tIns="0" bIns="0"/>
-          <a:lstStyle/>
-          <a:p>
-            <a:pPr algn="l"/>
-            <a:r>
-              <a:rPr sz="1900" b="1" i="0">
-                <a:solidFill>
-                  <a:srgbClr val="03306E"/>
-                </a:solidFill>
-                <a:latin typeface="Calibri"/>
-              </a:rPr>
-              <a:t>Mitigation</a:t>
-            </a:r>
-          </a:p>
-        </p:txBody>
-      </p:sp>
-      <p:sp>
-        <p:nvSpPr>
-          <p:cNvPr id="13" name="TextBox 12"/>
-          <p:cNvSpPr txBox="1"/>
-          <p:nvPr/>
-        </p:nvSpPr>
-        <p:spPr>
-          <a:xfrm>
-            <a:off x="6461607" y="2468880"/>
-            <a:ext cx="4952847" cy="1143000"/>
-          </a:xfrm>
-          <a:prstGeom prst="rect">
-            <a:avLst/>
-          </a:prstGeom>
-          <a:noFill/>
-        </p:spPr>
-        <p:txBody>
-          <a:bodyPr wrap="square" anchor="t" lIns="0" rIns="0" tIns="0" bIns="0"/>
-          <a:lstStyle/>
-          <a:p>
-            <a:pPr algn="l"/>
-            <a:r>
-              <a:rPr sz="2000" b="0" i="0">
-                <a:solidFill>
-                  <a:srgbClr val="202122"/>
-                </a:solidFill>
-                <a:latin typeface="Calibri"/>
-              </a:rPr>
-              <a:t>Identify and apply controls.</a:t>
-            </a:r>
-          </a:p>
-        </p:txBody>
-      </p:sp>
-      <p:sp>
-        <p:nvSpPr>
-          <p:cNvPr id="14" name="Rounded Rectangle 13"/>
-          <p:cNvSpPr/>
-          <p:nvPr/>
-        </p:nvSpPr>
-        <p:spPr>
-          <a:xfrm>
-            <a:off x="548640" y="4023360"/>
-            <a:ext cx="5410047" cy="2148840"/>
-          </a:xfrm>
-          <a:prstGeom prst="roundRect">
-            <a:avLst>
-              <a:gd name="adj" fmla="val 6000"/>
-            </a:avLst>
-          </a:prstGeom>
-          <a:solidFill>
-            <a:srgbClr val="EAF3FF"/>
-          </a:solidFill>
-          <a:ln>
-            <a:noFill/>
-          </a:ln>
-          <a:effectLst/>
-        </p:spPr>
-        <p:style>
-          <a:lnRef idx="1">
-            <a:schemeClr val="accent1"/>
-          </a:lnRef>
-          <a:fillRef idx="3">
-            <a:schemeClr val="accent1"/>
-          </a:fillRef>
-          <a:effectRef idx="2">
-            <a:schemeClr val="accent1"/>
-          </a:effectRef>
-          <a:fontRef idx="minor">
-            <a:schemeClr val="lt1"/>
-          </a:fontRef>
-        </p:style>
-        <p:txBody>
-          <a:bodyPr rtlCol="0" anchor="ctr"/>
-          <a:lstStyle/>
-          <a:p/>
-        </p:txBody>
-      </p:sp>
-      <p:sp>
-        <p:nvSpPr>
-          <p:cNvPr id="15" name="Oval 14"/>
-          <p:cNvSpPr/>
-          <p:nvPr/>
-        </p:nvSpPr>
-        <p:spPr>
-          <a:xfrm>
-            <a:off x="777240" y="4251960"/>
-            <a:ext cx="457200" cy="457200"/>
-          </a:xfrm>
-          <a:prstGeom prst="ellipse">
-            <a:avLst/>
-          </a:prstGeom>
-          <a:solidFill>
-            <a:srgbClr val="E0463A"/>
-          </a:solidFill>
-          <a:ln>
-            <a:noFill/>
-          </a:ln>
-          <a:effectLst/>
-        </p:spPr>
-        <p:style>
-          <a:lnRef idx="1">
-            <a:schemeClr val="accent1"/>
-          </a:lnRef>
-          <a:fillRef idx="3">
-            <a:schemeClr val="accent1"/>
-          </a:fillRef>
-          <a:effectRef idx="2">
-            <a:schemeClr val="accent1"/>
-          </a:effectRef>
-          <a:fontRef idx="minor">
-            <a:schemeClr val="lt1"/>
-          </a:fontRef>
-        </p:style>
-        <p:txBody>
-          <a:bodyPr rtlCol="0" anchor="ctr" lIns="0" rIns="0" tIns="0" bIns="0"/>
-          <a:lstStyle/>
-          <a:p>
-            <a:pPr algn="ctr"/>
-            <a:r>
-              <a:rPr sz="1500" b="1">
-                <a:solidFill>
-                  <a:srgbClr val="FFFFFF"/>
-                </a:solidFill>
-                <a:latin typeface="Calibri"/>
-              </a:rPr>
-              <a:t>3</a:t>
-            </a:r>
-          </a:p>
-        </p:txBody>
-      </p:sp>
-      <p:sp>
-        <p:nvSpPr>
-          <p:cNvPr id="16" name="TextBox 15"/>
-          <p:cNvSpPr txBox="1"/>
-          <p:nvPr/>
-        </p:nvSpPr>
-        <p:spPr>
-          <a:xfrm>
-            <a:off x="1371600" y="4224528"/>
-            <a:ext cx="4404207" cy="512064"/>
-          </a:xfrm>
-          <a:prstGeom prst="rect">
-            <a:avLst/>
-          </a:prstGeom>
-          <a:noFill/>
-        </p:spPr>
-        <p:txBody>
-          <a:bodyPr wrap="square" anchor="ctr" lIns="0" rIns="0" tIns="0" bIns="0"/>
-          <a:lstStyle/>
-          <a:p>
-            <a:pPr algn="l"/>
-            <a:r>
-              <a:rPr sz="1900" b="1" i="0">
-                <a:solidFill>
-                  <a:srgbClr val="03306E"/>
-                </a:solidFill>
-                <a:latin typeface="Calibri"/>
-              </a:rPr>
-              <a:t>Unfamiliar situations</a:t>
-            </a:r>
-          </a:p>
-        </p:txBody>
-      </p:sp>
-      <p:sp>
-        <p:nvSpPr>
-          <p:cNvPr id="17" name="TextBox 16"/>
-          <p:cNvSpPr txBox="1"/>
-          <p:nvPr/>
-        </p:nvSpPr>
-        <p:spPr>
-          <a:xfrm>
-            <a:off x="777240" y="4892040"/>
-            <a:ext cx="4952847" cy="1143000"/>
-          </a:xfrm>
-          <a:prstGeom prst="rect">
-            <a:avLst/>
-          </a:prstGeom>
-          <a:noFill/>
-        </p:spPr>
-        <p:txBody>
-          <a:bodyPr wrap="square" anchor="t" lIns="0" rIns="0" tIns="0" bIns="0"/>
-          <a:lstStyle/>
-          <a:p>
-            <a:pPr algn="l"/>
-            <a:r>
-              <a:rPr sz="2000" b="0" i="0">
-                <a:solidFill>
-                  <a:srgbClr val="202122"/>
-                </a:solidFill>
-                <a:latin typeface="Calibri"/>
-              </a:rPr>
-              <a:t>Stop, assess and ask.</a:t>
-            </a:r>
-          </a:p>
-        </p:txBody>
-      </p:sp>
-      <p:sp>
-        <p:nvSpPr>
-          <p:cNvPr id="18" name="Rounded Rectangle 17"/>
-          <p:cNvSpPr/>
-          <p:nvPr/>
-        </p:nvSpPr>
-        <p:spPr>
-          <a:xfrm>
-            <a:off x="6233007" y="4023360"/>
-            <a:ext cx="5410047" cy="2148840"/>
-          </a:xfrm>
-          <a:prstGeom prst="roundRect">
-            <a:avLst>
-              <a:gd name="adj" fmla="val 6000"/>
-            </a:avLst>
-          </a:prstGeom>
-          <a:solidFill>
-            <a:srgbClr val="EAF3FF"/>
-          </a:solidFill>
-          <a:ln>
-            <a:noFill/>
-          </a:ln>
-          <a:effectLst/>
-        </p:spPr>
-        <p:style>
-          <a:lnRef idx="1">
-            <a:schemeClr val="accent1"/>
-          </a:lnRef>
-          <a:fillRef idx="3">
-            <a:schemeClr val="accent1"/>
-          </a:fillRef>
-          <a:effectRef idx="2">
-            <a:schemeClr val="accent1"/>
-          </a:effectRef>
-          <a:fontRef idx="minor">
-            <a:schemeClr val="lt1"/>
-          </a:fontRef>
-        </p:style>
-        <p:txBody>
-          <a:bodyPr rtlCol="0" anchor="ctr"/>
-          <a:lstStyle/>
-          <a:p/>
-        </p:txBody>
-      </p:sp>
-      <p:sp>
-        <p:nvSpPr>
-          <p:cNvPr id="19" name="Oval 18"/>
-          <p:cNvSpPr/>
-          <p:nvPr/>
-        </p:nvSpPr>
-        <p:spPr>
-          <a:xfrm>
-            <a:off x="6461607" y="4251960"/>
-            <a:ext cx="457200" cy="457200"/>
-          </a:xfrm>
-          <a:prstGeom prst="ellipse">
-            <a:avLst/>
-          </a:prstGeom>
-          <a:solidFill>
-            <a:srgbClr val="E0463A"/>
-          </a:solidFill>
-          <a:ln>
-            <a:noFill/>
-          </a:ln>
-          <a:effectLst/>
-        </p:spPr>
-        <p:style>
-          <a:lnRef idx="1">
-            <a:schemeClr val="accent1"/>
-          </a:lnRef>
-          <a:fillRef idx="3">
-            <a:schemeClr val="accent1"/>
-          </a:fillRef>
-          <a:effectRef idx="2">
-            <a:schemeClr val="accent1"/>
-          </a:effectRef>
-          <a:fontRef idx="minor">
-            <a:schemeClr val="lt1"/>
-          </a:fontRef>
-        </p:style>
-        <p:txBody>
-          <a:bodyPr rtlCol="0" anchor="ctr" lIns="0" rIns="0" tIns="0" bIns="0"/>
-          <a:lstStyle/>
-          <a:p>
-            <a:pPr algn="ctr"/>
-            <a:r>
-              <a:rPr sz="1500" b="1">
-                <a:solidFill>
-                  <a:srgbClr val="FFFFFF"/>
-                </a:solidFill>
-                <a:latin typeface="Calibri"/>
-              </a:rPr>
-              <a:t>4</a:t>
-            </a:r>
-          </a:p>
-        </p:txBody>
-      </p:sp>
-      <p:sp>
-        <p:nvSpPr>
-          <p:cNvPr id="20" name="TextBox 19"/>
-          <p:cNvSpPr txBox="1"/>
-          <p:nvPr/>
-        </p:nvSpPr>
-        <p:spPr>
-          <a:xfrm>
-            <a:off x="7055967" y="4224528"/>
-            <a:ext cx="4404207" cy="512064"/>
-          </a:xfrm>
-          <a:prstGeom prst="rect">
-            <a:avLst/>
-          </a:prstGeom>
-          <a:noFill/>
-        </p:spPr>
-        <p:txBody>
-          <a:bodyPr wrap="square" anchor="ctr" lIns="0" rIns="0" tIns="0" bIns="0"/>
-          <a:lstStyle/>
-          <a:p>
-            <a:pPr algn="l"/>
-            <a:r>
-              <a:rPr sz="1900" b="1" i="0">
-                <a:solidFill>
-                  <a:srgbClr val="03306E"/>
-                </a:solidFill>
-                <a:latin typeface="Calibri"/>
-              </a:rPr>
-              <a:t>Commercial risk</a:t>
-            </a:r>
-          </a:p>
-        </p:txBody>
-      </p:sp>
-      <p:sp>
-        <p:nvSpPr>
-          <p:cNvPr id="21" name="TextBox 20"/>
-          <p:cNvSpPr txBox="1"/>
-          <p:nvPr/>
-        </p:nvSpPr>
-        <p:spPr>
-          <a:xfrm>
-            <a:off x="6461607" y="4892040"/>
-            <a:ext cx="4952847" cy="1143000"/>
-          </a:xfrm>
-          <a:prstGeom prst="rect">
-            <a:avLst/>
-          </a:prstGeom>
-          <a:noFill/>
-        </p:spPr>
-        <p:txBody>
-          <a:bodyPr wrap="square" anchor="t" lIns="0" rIns="0" tIns="0" bIns="0"/>
-          <a:lstStyle/>
-          <a:p>
-            <a:pPr algn="l"/>
-            <a:r>
-              <a:rPr sz="2000" b="0" i="0">
-                <a:solidFill>
-                  <a:srgbClr val="202122"/>
-                </a:solidFill>
-                <a:latin typeface="Calibri"/>
-              </a:rPr>
-              <a:t>Ranking models to prioritise business risks.</a:t>
+                <a:latin typeface="Cambria"/>
+              </a:rPr>
+              <a:t>Testing a new high-speed spindle: guard it, run it up in stages from outside the enclosure, and have an emergency stop within reach.</a:t>
             </a:r>
           </a:p>
         </p:txBody>
@@ -6156,7 +8078,7 @@
                 </a:solidFill>
                 <a:latin typeface="Cambria"/>
               </a:rPr>
-              <a:t>Testing and quality assuring</a:t>
+              <a:t>Risk management</a:t>
             </a:r>
           </a:p>
         </p:txBody>
@@ -6229,20 +8151,22 @@
       </p:sp>
       <p:sp>
         <p:nvSpPr>
-          <p:cNvPr id="6" name="Rectangle 5"/>
+          <p:cNvPr id="6" name="Rounded Rectangle 5"/>
           <p:cNvSpPr/>
           <p:nvPr/>
         </p:nvSpPr>
         <p:spPr>
           <a:xfrm>
-            <a:off x="1884006" y="2793492"/>
-            <a:ext cx="8423681" cy="36576"/>
-          </a:xfrm>
-          <a:prstGeom prst="rect">
-            <a:avLst/>
+            <a:off x="548640" y="1600200"/>
+            <a:ext cx="5410047" cy="2148840"/>
+          </a:xfrm>
+          <a:prstGeom prst="roundRect">
+            <a:avLst>
+              <a:gd name="adj" fmla="val 6000"/>
+            </a:avLst>
           </a:prstGeom>
           <a:solidFill>
-            <a:srgbClr val="A9C8F0"/>
+            <a:srgbClr val="EAF3FF"/>
           </a:solidFill>
           <a:ln>
             <a:noFill/>
@@ -6277,8 +8201,8 @@
         </p:nvSpPr>
         <p:spPr>
           <a:xfrm>
-            <a:off x="1563966" y="2491740"/>
-            <a:ext cx="640080" cy="640080"/>
+            <a:off x="777240" y="1828800"/>
+            <a:ext cx="457200" cy="457200"/>
           </a:xfrm>
           <a:prstGeom prst="ellipse">
             <a:avLst/>
@@ -6311,7 +8235,7 @@
           <a:p>
             <a:pPr algn="ctr"/>
             <a:r>
-              <a:rPr sz="2000" b="1">
+              <a:rPr sz="1500" b="1">
                 <a:solidFill>
                   <a:srgbClr val="FFFFFF"/>
                 </a:solidFill>
@@ -6330,8 +8254,8 @@
         </p:nvSpPr>
         <p:spPr>
           <a:xfrm>
-            <a:off x="548640" y="3268979"/>
-            <a:ext cx="2670733" cy="731520"/>
+            <a:off x="1371600" y="1801368"/>
+            <a:ext cx="4404207" cy="512064"/>
           </a:xfrm>
           <a:prstGeom prst="rect">
             <a:avLst/>
@@ -6339,32 +8263,65 @@
           <a:noFill/>
         </p:spPr>
         <p:txBody>
+          <a:bodyPr wrap="square" anchor="ctr" lIns="0" rIns="0" tIns="0" bIns="0"/>
+          <a:lstStyle/>
+          <a:p>
+            <a:pPr algn="l"/>
+            <a:r>
+              <a:rPr sz="1900" b="1" i="0">
+                <a:solidFill>
+                  <a:srgbClr val="03306E"/>
+                </a:solidFill>
+                <a:latin typeface="Calibri"/>
+              </a:rPr>
+              <a:t>Contexts</a:t>
+            </a:r>
+          </a:p>
+        </p:txBody>
+      </p:sp>
+      <p:sp>
+        <p:nvSpPr>
+          <p:cNvPr id="9" name="TextBox 8"/>
+          <p:cNvSpPr txBox="1"/>
+          <p:nvPr/>
+        </p:nvSpPr>
+        <p:spPr>
+          <a:xfrm>
+            <a:off x="777240" y="2468880"/>
+            <a:ext cx="4952847" cy="1143000"/>
+          </a:xfrm>
+          <a:prstGeom prst="rect">
+            <a:avLst/>
+          </a:prstGeom>
+          <a:noFill/>
+        </p:spPr>
+        <p:txBody>
           <a:bodyPr wrap="square" anchor="t" lIns="0" rIns="0" tIns="0" bIns="0"/>
           <a:lstStyle/>
           <a:p>
-            <a:pPr algn="ctr"/>
-            <a:r>
-              <a:rPr sz="1700" b="1" i="0">
-                <a:solidFill>
-                  <a:srgbClr val="03306E"/>
-                </a:solidFill>
-                <a:latin typeface="Calibri"/>
-              </a:rPr>
-              <a:t>Model</a:t>
-            </a:r>
-          </a:p>
-        </p:txBody>
-      </p:sp>
-      <p:sp>
-        <p:nvSpPr>
-          <p:cNvPr id="9" name="Rounded Rectangle 8"/>
+            <a:pPr algn="l"/>
+            <a:r>
+              <a:rPr sz="2000" b="0" i="0">
+                <a:solidFill>
+                  <a:srgbClr val="202122"/>
+                </a:solidFill>
+                <a:latin typeface="Calibri"/>
+              </a:rPr>
+              <a:t>Machining, mechanical handling, high-power applications.</a:t>
+            </a:r>
+          </a:p>
+        </p:txBody>
+      </p:sp>
+      <p:sp>
+        <p:nvSpPr>
+          <p:cNvPr id="10" name="Rounded Rectangle 9"/>
           <p:cNvSpPr/>
           <p:nvPr/>
         </p:nvSpPr>
         <p:spPr>
           <a:xfrm>
-            <a:off x="548640" y="4046220"/>
-            <a:ext cx="2670733" cy="1234439"/>
+            <a:off x="6233007" y="1600200"/>
+            <a:ext cx="5410047" cy="2148840"/>
           </a:xfrm>
           <a:prstGeom prst="roundRect">
             <a:avLst>
@@ -6401,47 +8358,14 @@
       </p:sp>
       <p:sp>
         <p:nvSpPr>
-          <p:cNvPr id="10" name="TextBox 9"/>
-          <p:cNvSpPr txBox="1"/>
-          <p:nvPr/>
-        </p:nvSpPr>
-        <p:spPr>
-          <a:xfrm>
-            <a:off x="685800" y="4183380"/>
-            <a:ext cx="2396413" cy="960119"/>
-          </a:xfrm>
-          <a:prstGeom prst="rect">
-            <a:avLst/>
-          </a:prstGeom>
-          <a:noFill/>
-        </p:spPr>
-        <p:txBody>
-          <a:bodyPr wrap="square" anchor="t" lIns="0" rIns="0" tIns="0" bIns="0"/>
-          <a:lstStyle/>
-          <a:p>
-            <a:pPr algn="l"/>
-            <a:r>
-              <a:rPr sz="1800" b="0" i="0">
-                <a:solidFill>
-                  <a:srgbClr val="202122"/>
-                </a:solidFill>
-                <a:latin typeface="Calibri"/>
-              </a:rPr>
-              <a:t>Virtual or physical models and prototypes.</a:t>
-            </a:r>
-          </a:p>
-        </p:txBody>
-      </p:sp>
-      <p:sp>
-        <p:nvSpPr>
           <p:cNvPr id="11" name="Oval 10"/>
           <p:cNvSpPr/>
           <p:nvPr/>
         </p:nvSpPr>
         <p:spPr>
           <a:xfrm>
-            <a:off x="4371860" y="2491740"/>
-            <a:ext cx="640080" cy="640080"/>
+            <a:off x="6461607" y="1828800"/>
+            <a:ext cx="457200" cy="457200"/>
           </a:xfrm>
           <a:prstGeom prst="ellipse">
             <a:avLst/>
@@ -6474,7 +8398,7 @@
           <a:p>
             <a:pPr algn="ctr"/>
             <a:r>
-              <a:rPr sz="2000" b="1">
+              <a:rPr sz="1500" b="1">
                 <a:solidFill>
                   <a:srgbClr val="FFFFFF"/>
                 </a:solidFill>
@@ -6493,8 +8417,8 @@
         </p:nvSpPr>
         <p:spPr>
           <a:xfrm>
-            <a:off x="3356533" y="3268979"/>
-            <a:ext cx="2670733" cy="731520"/>
+            <a:off x="7055967" y="1801368"/>
+            <a:ext cx="4404207" cy="512064"/>
           </a:xfrm>
           <a:prstGeom prst="rect">
             <a:avLst/>
@@ -6502,32 +8426,65 @@
           <a:noFill/>
         </p:spPr>
         <p:txBody>
+          <a:bodyPr wrap="square" anchor="ctr" lIns="0" rIns="0" tIns="0" bIns="0"/>
+          <a:lstStyle/>
+          <a:p>
+            <a:pPr algn="l"/>
+            <a:r>
+              <a:rPr sz="1900" b="1" i="0">
+                <a:solidFill>
+                  <a:srgbClr val="03306E"/>
+                </a:solidFill>
+                <a:latin typeface="Calibri"/>
+              </a:rPr>
+              <a:t>Mitigation</a:t>
+            </a:r>
+          </a:p>
+        </p:txBody>
+      </p:sp>
+      <p:sp>
+        <p:nvSpPr>
+          <p:cNvPr id="13" name="TextBox 12"/>
+          <p:cNvSpPr txBox="1"/>
+          <p:nvPr/>
+        </p:nvSpPr>
+        <p:spPr>
+          <a:xfrm>
+            <a:off x="6461607" y="2468880"/>
+            <a:ext cx="4952847" cy="1143000"/>
+          </a:xfrm>
+          <a:prstGeom prst="rect">
+            <a:avLst/>
+          </a:prstGeom>
+          <a:noFill/>
+        </p:spPr>
+        <p:txBody>
           <a:bodyPr wrap="square" anchor="t" lIns="0" rIns="0" tIns="0" bIns="0"/>
           <a:lstStyle/>
           <a:p>
-            <a:pPr algn="ctr"/>
-            <a:r>
-              <a:rPr sz="1700" b="1" i="0">
-                <a:solidFill>
-                  <a:srgbClr val="03306E"/>
-                </a:solidFill>
-                <a:latin typeface="Calibri"/>
-              </a:rPr>
-              <a:t>Test</a:t>
-            </a:r>
-          </a:p>
-        </p:txBody>
-      </p:sp>
-      <p:sp>
-        <p:nvSpPr>
-          <p:cNvPr id="13" name="Rounded Rectangle 12"/>
+            <a:pPr algn="l"/>
+            <a:r>
+              <a:rPr sz="2000" b="0" i="0">
+                <a:solidFill>
+                  <a:srgbClr val="202122"/>
+                </a:solidFill>
+                <a:latin typeface="Calibri"/>
+              </a:rPr>
+              <a:t>Identify and apply controls.</a:t>
+            </a:r>
+          </a:p>
+        </p:txBody>
+      </p:sp>
+      <p:sp>
+        <p:nvSpPr>
+          <p:cNvPr id="14" name="Rounded Rectangle 13"/>
           <p:cNvSpPr/>
           <p:nvPr/>
         </p:nvSpPr>
         <p:spPr>
           <a:xfrm>
-            <a:off x="3356533" y="4046220"/>
-            <a:ext cx="2670733" cy="1234439"/>
+            <a:off x="548640" y="4023360"/>
+            <a:ext cx="5410047" cy="2148840"/>
           </a:xfrm>
           <a:prstGeom prst="roundRect">
             <a:avLst>
@@ -6564,47 +8521,14 @@
       </p:sp>
       <p:sp>
         <p:nvSpPr>
-          <p:cNvPr id="14" name="TextBox 13"/>
-          <p:cNvSpPr txBox="1"/>
-          <p:nvPr/>
-        </p:nvSpPr>
-        <p:spPr>
-          <a:xfrm>
-            <a:off x="3493693" y="4183380"/>
-            <a:ext cx="2396413" cy="960119"/>
-          </a:xfrm>
-          <a:prstGeom prst="rect">
-            <a:avLst/>
-          </a:prstGeom>
-          <a:noFill/>
-        </p:spPr>
-        <p:txBody>
-          <a:bodyPr wrap="square" anchor="t" lIns="0" rIns="0" tIns="0" bIns="0"/>
-          <a:lstStyle/>
-          <a:p>
-            <a:pPr algn="l"/>
-            <a:r>
-              <a:rPr sz="1800" b="0" i="0">
-                <a:solidFill>
-                  <a:srgbClr val="202122"/>
-                </a:solidFill>
-                <a:latin typeface="Calibri"/>
-              </a:rPr>
-              <a:t>Concept, functional, measurement, visual inspection.</a:t>
-            </a:r>
-          </a:p>
-        </p:txBody>
-      </p:sp>
-      <p:sp>
-        <p:nvSpPr>
           <p:cNvPr id="15" name="Oval 14"/>
           <p:cNvSpPr/>
           <p:nvPr/>
         </p:nvSpPr>
         <p:spPr>
           <a:xfrm>
-            <a:off x="7179754" y="2491740"/>
-            <a:ext cx="640080" cy="640080"/>
+            <a:off x="777240" y="4251960"/>
+            <a:ext cx="457200" cy="457200"/>
           </a:xfrm>
           <a:prstGeom prst="ellipse">
             <a:avLst/>
@@ -6637,7 +8561,7 @@
           <a:p>
             <a:pPr algn="ctr"/>
             <a:r>
-              <a:rPr sz="2000" b="1">
+              <a:rPr sz="1500" b="1">
                 <a:solidFill>
                   <a:srgbClr val="FFFFFF"/>
                 </a:solidFill>
@@ -6656,8 +8580,8 @@
         </p:nvSpPr>
         <p:spPr>
           <a:xfrm>
-            <a:off x="6164427" y="3268979"/>
-            <a:ext cx="2670733" cy="731520"/>
+            <a:off x="1371600" y="4224528"/>
+            <a:ext cx="4404207" cy="512064"/>
           </a:xfrm>
           <a:prstGeom prst="rect">
             <a:avLst/>
@@ -6665,32 +8589,65 @@
           <a:noFill/>
         </p:spPr>
         <p:txBody>
+          <a:bodyPr wrap="square" anchor="ctr" lIns="0" rIns="0" tIns="0" bIns="0"/>
+          <a:lstStyle/>
+          <a:p>
+            <a:pPr algn="l"/>
+            <a:r>
+              <a:rPr sz="1900" b="1" i="0">
+                <a:solidFill>
+                  <a:srgbClr val="03306E"/>
+                </a:solidFill>
+                <a:latin typeface="Calibri"/>
+              </a:rPr>
+              <a:t>Unfamiliar situations</a:t>
+            </a:r>
+          </a:p>
+        </p:txBody>
+      </p:sp>
+      <p:sp>
+        <p:nvSpPr>
+          <p:cNvPr id="17" name="TextBox 16"/>
+          <p:cNvSpPr txBox="1"/>
+          <p:nvPr/>
+        </p:nvSpPr>
+        <p:spPr>
+          <a:xfrm>
+            <a:off x="777240" y="4892040"/>
+            <a:ext cx="4952847" cy="1143000"/>
+          </a:xfrm>
+          <a:prstGeom prst="rect">
+            <a:avLst/>
+          </a:prstGeom>
+          <a:noFill/>
+        </p:spPr>
+        <p:txBody>
           <a:bodyPr wrap="square" anchor="t" lIns="0" rIns="0" tIns="0" bIns="0"/>
           <a:lstStyle/>
           <a:p>
-            <a:pPr algn="ctr"/>
-            <a:r>
-              <a:rPr sz="1700" b="1" i="0">
-                <a:solidFill>
-                  <a:srgbClr val="03306E"/>
-                </a:solidFill>
-                <a:latin typeface="Calibri"/>
-              </a:rPr>
-              <a:t>Report</a:t>
-            </a:r>
-          </a:p>
-        </p:txBody>
-      </p:sp>
-      <p:sp>
-        <p:nvSpPr>
-          <p:cNvPr id="17" name="Rounded Rectangle 16"/>
+            <a:pPr algn="l"/>
+            <a:r>
+              <a:rPr sz="2000" b="0" i="0">
+                <a:solidFill>
+                  <a:srgbClr val="202122"/>
+                </a:solidFill>
+                <a:latin typeface="Calibri"/>
+              </a:rPr>
+              <a:t>Stop, assess and ask.</a:t>
+            </a:r>
+          </a:p>
+        </p:txBody>
+      </p:sp>
+      <p:sp>
+        <p:nvSpPr>
+          <p:cNvPr id="18" name="Rounded Rectangle 17"/>
           <p:cNvSpPr/>
           <p:nvPr/>
         </p:nvSpPr>
         <p:spPr>
           <a:xfrm>
-            <a:off x="6164427" y="4046220"/>
-            <a:ext cx="2670733" cy="1234439"/>
+            <a:off x="6233007" y="4023360"/>
+            <a:ext cx="5410047" cy="2148840"/>
           </a:xfrm>
           <a:prstGeom prst="roundRect">
             <a:avLst>
@@ -6727,47 +8684,14 @@
       </p:sp>
       <p:sp>
         <p:nvSpPr>
-          <p:cNvPr id="18" name="TextBox 17"/>
-          <p:cNvSpPr txBox="1"/>
-          <p:nvPr/>
-        </p:nvSpPr>
-        <p:spPr>
-          <a:xfrm>
-            <a:off x="6301587" y="4183380"/>
-            <a:ext cx="2396413" cy="960119"/>
-          </a:xfrm>
-          <a:prstGeom prst="rect">
-            <a:avLst/>
-          </a:prstGeom>
-          <a:noFill/>
-        </p:spPr>
-        <p:txBody>
-          <a:bodyPr wrap="square" anchor="t" lIns="0" rIns="0" tIns="0" bIns="0"/>
-          <a:lstStyle/>
-          <a:p>
-            <a:pPr algn="l"/>
-            <a:r>
-              <a:rPr sz="1800" b="0" i="0">
-                <a:solidFill>
-                  <a:srgbClr val="202122"/>
-                </a:solidFill>
-                <a:latin typeface="Calibri"/>
-              </a:rPr>
-              <a:t>Record and respond to results.</a:t>
-            </a:r>
-          </a:p>
-        </p:txBody>
-      </p:sp>
-      <p:sp>
-        <p:nvSpPr>
           <p:cNvPr id="19" name="Oval 18"/>
           <p:cNvSpPr/>
           <p:nvPr/>
         </p:nvSpPr>
         <p:spPr>
           <a:xfrm>
-            <a:off x="9987648" y="2491740"/>
-            <a:ext cx="640080" cy="640080"/>
+            <a:off x="6461607" y="4251960"/>
+            <a:ext cx="457200" cy="457200"/>
           </a:xfrm>
           <a:prstGeom prst="ellipse">
             <a:avLst/>
@@ -6800,7 +8724,7 @@
           <a:p>
             <a:pPr algn="ctr"/>
             <a:r>
-              <a:rPr sz="2000" b="1">
+              <a:rPr sz="1500" b="1">
                 <a:solidFill>
                   <a:srgbClr val="FFFFFF"/>
                 </a:solidFill>
@@ -6819,8 +8743,8 @@
         </p:nvSpPr>
         <p:spPr>
           <a:xfrm>
-            <a:off x="8972321" y="3268979"/>
-            <a:ext cx="2670733" cy="731520"/>
+            <a:off x="7055967" y="4224528"/>
+            <a:ext cx="4404207" cy="512064"/>
           </a:xfrm>
           <a:prstGeom prst="rect">
             <a:avLst/>
@@ -6828,95 +8752,51 @@
           <a:noFill/>
         </p:spPr>
         <p:txBody>
+          <a:bodyPr wrap="square" anchor="ctr" lIns="0" rIns="0" tIns="0" bIns="0"/>
+          <a:lstStyle/>
+          <a:p>
+            <a:pPr algn="l"/>
+            <a:r>
+              <a:rPr sz="1900" b="1" i="0">
+                <a:solidFill>
+                  <a:srgbClr val="03306E"/>
+                </a:solidFill>
+                <a:latin typeface="Calibri"/>
+              </a:rPr>
+              <a:t>Commercial risk</a:t>
+            </a:r>
+          </a:p>
+        </p:txBody>
+      </p:sp>
+      <p:sp>
+        <p:nvSpPr>
+          <p:cNvPr id="21" name="TextBox 20"/>
+          <p:cNvSpPr txBox="1"/>
+          <p:nvPr/>
+        </p:nvSpPr>
+        <p:spPr>
+          <a:xfrm>
+            <a:off x="6461607" y="4892040"/>
+            <a:ext cx="4952847" cy="1143000"/>
+          </a:xfrm>
+          <a:prstGeom prst="rect">
+            <a:avLst/>
+          </a:prstGeom>
+          <a:noFill/>
+        </p:spPr>
+        <p:txBody>
           <a:bodyPr wrap="square" anchor="t" lIns="0" rIns="0" tIns="0" bIns="0"/>
           <a:lstStyle/>
           <a:p>
-            <a:pPr algn="ctr"/>
-            <a:r>
-              <a:rPr sz="1700" b="1" i="0">
-                <a:solidFill>
-                  <a:srgbClr val="03306E"/>
-                </a:solidFill>
-                <a:latin typeface="Calibri"/>
-              </a:rPr>
-              <a:t>Check</a:t>
-            </a:r>
-          </a:p>
-        </p:txBody>
-      </p:sp>
-      <p:sp>
-        <p:nvSpPr>
-          <p:cNvPr id="21" name="Rounded Rectangle 20"/>
-          <p:cNvSpPr/>
-          <p:nvPr/>
-        </p:nvSpPr>
-        <p:spPr>
-          <a:xfrm>
-            <a:off x="8972321" y="4046220"/>
-            <a:ext cx="2670733" cy="1234439"/>
-          </a:xfrm>
-          <a:prstGeom prst="roundRect">
-            <a:avLst>
-              <a:gd name="adj" fmla="val 6000"/>
-            </a:avLst>
-          </a:prstGeom>
-          <a:solidFill>
-            <a:srgbClr val="EAF3FF"/>
-          </a:solidFill>
-          <a:ln>
-            <a:noFill/>
-          </a:ln>
-          <a:effectLst/>
-        </p:spPr>
-        <p:style>
-          <a:lnRef idx="1">
-            <a:schemeClr val="accent1"/>
-          </a:lnRef>
-          <a:fillRef idx="3">
-            <a:schemeClr val="accent1"/>
-          </a:fillRef>
-          <a:effectRef idx="2">
-            <a:schemeClr val="accent1"/>
-          </a:effectRef>
-          <a:fontRef idx="minor">
-            <a:schemeClr val="lt1"/>
-          </a:fontRef>
-        </p:style>
-        <p:txBody>
-          <a:bodyPr rtlCol="0" anchor="ctr"/>
-          <a:lstStyle/>
-          <a:p/>
-        </p:txBody>
-      </p:sp>
-      <p:sp>
-        <p:nvSpPr>
-          <p:cNvPr id="22" name="TextBox 21"/>
-          <p:cNvSpPr txBox="1"/>
-          <p:nvPr/>
-        </p:nvSpPr>
-        <p:spPr>
-          <a:xfrm>
-            <a:off x="9109481" y="4183380"/>
-            <a:ext cx="2396413" cy="960119"/>
-          </a:xfrm>
-          <a:prstGeom prst="rect">
-            <a:avLst/>
-          </a:prstGeom>
-          <a:noFill/>
-        </p:spPr>
-        <p:txBody>
-          <a:bodyPr wrap="square" anchor="t" lIns="0" rIns="0" tIns="0" bIns="0"/>
-          <a:lstStyle/>
-          <a:p>
             <a:pPr algn="l"/>
             <a:r>
-              <a:rPr sz="1800" b="0" i="0">
+              <a:rPr sz="2000" b="0" i="0">
                 <a:solidFill>
                   <a:srgbClr val="202122"/>
                 </a:solidFill>
                 <a:latin typeface="Calibri"/>
               </a:rPr>
-              <a:t>Drawings for quality, compliance and completeness.</a:t>
+              <a:t>Ranking models to prioritise business risks.</a:t>
             </a:r>
           </a:p>
         </p:txBody>
@@ -7008,7 +8888,7 @@
                 </a:solidFill>
                 <a:latin typeface="Cambria"/>
               </a:rPr>
-              <a:t>Check your understanding</a:t>
+              <a:t>Quick check: Risk management</a:t>
             </a:r>
           </a:p>
         </p:txBody>
@@ -7087,8 +8967,8 @@
         </p:nvSpPr>
         <p:spPr>
           <a:xfrm>
-            <a:off x="548640" y="1618488"/>
-            <a:ext cx="411480" cy="411480"/>
+            <a:off x="548640" y="1691640"/>
+            <a:ext cx="502920" cy="502920"/>
           </a:xfrm>
           <a:prstGeom prst="ellipse">
             <a:avLst/>
@@ -7121,7 +9001,7 @@
           <a:p>
             <a:pPr algn="ctr"/>
             <a:r>
-              <a:rPr sz="1400" b="1">
+              <a:rPr sz="1600" b="1">
                 <a:solidFill>
                   <a:srgbClr val="FFFFFF"/>
                 </a:solidFill>
@@ -7140,8 +9020,8 @@
         </p:nvSpPr>
         <p:spPr>
           <a:xfrm>
-            <a:off x="1234440" y="1600200"/>
-            <a:ext cx="10408615" cy="1429512"/>
+            <a:off x="1371600" y="1645920"/>
+            <a:ext cx="10271455" cy="1188720"/>
           </a:xfrm>
           <a:prstGeom prst="rect">
             <a:avLst/>
@@ -7154,13 +9034,13 @@
           <a:p>
             <a:pPr algn="l"/>
             <a:r>
-              <a:rPr sz="2200" b="0" i="0">
+              <a:rPr sz="2400" b="0" i="0">
                 <a:solidFill>
                   <a:srgbClr val="202122"/>
                 </a:solidFill>
                 <a:latin typeface="Calibri"/>
               </a:rPr>
-              <a:t>Name two professional engineering bodies.</a:t>
+              <a:t>Name two high-risk engineering activities.</a:t>
             </a:r>
           </a:p>
         </p:txBody>
@@ -7173,8 +9053,8 @@
         </p:nvSpPr>
         <p:spPr>
           <a:xfrm>
-            <a:off x="548640" y="3212592"/>
-            <a:ext cx="411480" cy="411480"/>
+            <a:off x="548640" y="3108960"/>
+            <a:ext cx="502920" cy="502920"/>
           </a:xfrm>
           <a:prstGeom prst="ellipse">
             <a:avLst/>
@@ -7207,7 +9087,7 @@
           <a:p>
             <a:pPr algn="ctr"/>
             <a:r>
-              <a:rPr sz="1400" b="1">
+              <a:rPr sz="1600" b="1">
                 <a:solidFill>
                   <a:srgbClr val="FFFFFF"/>
                 </a:solidFill>
@@ -7226,8 +9106,8 @@
         </p:nvSpPr>
         <p:spPr>
           <a:xfrm>
-            <a:off x="1234440" y="3194304"/>
-            <a:ext cx="10408615" cy="1429512"/>
+            <a:off x="1371600" y="3063240"/>
+            <a:ext cx="10271455" cy="1188720"/>
           </a:xfrm>
           <a:prstGeom prst="rect">
             <a:avLst/>
@@ -7240,7 +9120,7 @@
           <a:p>
             <a:pPr algn="l"/>
             <a:r>
-              <a:rPr sz="2200" b="0" i="0">
+              <a:rPr sz="2400" b="0" i="0">
                 <a:solidFill>
                   <a:srgbClr val="202122"/>
                 </a:solidFill>
@@ -7259,8 +9139,8 @@
         </p:nvSpPr>
         <p:spPr>
           <a:xfrm>
-            <a:off x="548640" y="4806695"/>
-            <a:ext cx="411480" cy="411480"/>
+            <a:off x="548640" y="4526280"/>
+            <a:ext cx="502920" cy="502920"/>
           </a:xfrm>
           <a:prstGeom prst="ellipse">
             <a:avLst/>
@@ -7293,7 +9173,7 @@
           <a:p>
             <a:pPr algn="ctr"/>
             <a:r>
-              <a:rPr sz="1400" b="1">
+              <a:rPr sz="1600" b="1">
                 <a:solidFill>
                   <a:srgbClr val="FFFFFF"/>
                 </a:solidFill>
@@ -7312,8 +9192,8 @@
         </p:nvSpPr>
         <p:spPr>
           <a:xfrm>
-            <a:off x="1234440" y="4788408"/>
-            <a:ext cx="10408615" cy="1429512"/>
+            <a:off x="1371600" y="4480560"/>
+            <a:ext cx="10271455" cy="1188720"/>
           </a:xfrm>
           <a:prstGeom prst="rect">
             <a:avLst/>
@@ -7326,13 +9206,46 @@
           <a:p>
             <a:pPr algn="l"/>
             <a:r>
-              <a:rPr sz="2200" b="0" i="0">
+              <a:rPr sz="2400" b="0" i="0">
                 <a:solidFill>
                   <a:srgbClr val="202122"/>
                 </a:solidFill>
                 <a:latin typeface="Calibri"/>
               </a:rPr>
-              <a:t>What does quality assuring a drawing involve?</a:t>
+              <a:t>How are commercial risks ranked?</a:t>
+            </a:r>
+          </a:p>
+        </p:txBody>
+      </p:sp>
+      <p:sp>
+        <p:nvSpPr>
+          <p:cNvPr id="12" name="TextBox 11"/>
+          <p:cNvSpPr txBox="1"/>
+          <p:nvPr/>
+        </p:nvSpPr>
+        <p:spPr>
+          <a:xfrm>
+            <a:off x="548640" y="5852160"/>
+            <a:ext cx="11094415" cy="365760"/>
+          </a:xfrm>
+          <a:prstGeom prst="rect">
+            <a:avLst/>
+          </a:prstGeom>
+          <a:noFill/>
+        </p:spPr>
+        <p:txBody>
+          <a:bodyPr wrap="square" anchor="t" lIns="0" rIns="0" tIns="0" bIns="0"/>
+          <a:lstStyle/>
+          <a:p>
+            <a:pPr algn="l"/>
+            <a:r>
+              <a:rPr sz="1300" b="0" i="1">
+                <a:solidFill>
+                  <a:srgbClr val="54595D"/>
+                </a:solidFill>
+                <a:latin typeface="Calibri"/>
+              </a:rPr>
+              <a:t>Answer on mini whiteboards or in your book. Answers are in the speaker notes.</a:t>
             </a:r>
           </a:p>
         </p:txBody>
@@ -7424,7 +9337,7 @@
                 </a:solidFill>
                 <a:latin typeface="Cambria"/>
               </a:rPr>
-              <a:t>Answers</a:t>
+              <a:t>Testing and quality assuring</a:t>
             </a:r>
           </a:p>
         </p:txBody>
@@ -7497,14 +9410,129 @@
       </p:sp>
       <p:sp>
         <p:nvSpPr>
-          <p:cNvPr id="6" name="Oval 5"/>
+          <p:cNvPr id="6" name="TextBox 5"/>
+          <p:cNvSpPr txBox="1"/>
+          <p:nvPr/>
+        </p:nvSpPr>
+        <p:spPr>
+          <a:xfrm>
+            <a:off x="548640" y="1554480"/>
+            <a:ext cx="6720840" cy="4617720"/>
+          </a:xfrm>
+          <a:prstGeom prst="rect">
+            <a:avLst/>
+          </a:prstGeom>
+          <a:noFill/>
+        </p:spPr>
+        <p:txBody>
+          <a:bodyPr wrap="square" lIns="0" rIns="0" tIns="0" bIns="0">
+            <a:spAutoFit/>
+          </a:bodyPr>
+          <a:lstStyle/>
+          <a:p>
+            <a:pPr>
+              <a:spcAft>
+                <a:spcPts val="1320"/>
+              </a:spcAft>
+            </a:pPr>
+            <a:r>
+              <a:rPr sz="2200" b="0">
+                <a:solidFill>
+                  <a:srgbClr val="202122"/>
+                </a:solidFill>
+                <a:latin typeface="Calibri"/>
+              </a:rPr>
+              <a:t>Models and prototypes, virtual or physical (block models, 3D prints, one-off prototypes), are tested through concept testing, functional tests, measurement and visual inspection. Results are recorded and acted on.</a:t>
+            </a:r>
+          </a:p>
+          <a:p>
+            <a:pPr>
+              <a:spcAft>
+                <a:spcPts val="1320"/>
+              </a:spcAft>
+            </a:pPr>
+            <a:r>
+              <a:rPr sz="2200" b="0">
+                <a:solidFill>
+                  <a:srgbClr val="202122"/>
+                </a:solidFill>
+                <a:latin typeface="Calibri"/>
+              </a:rPr>
+              <a:t>Design information, such as proposals, specifications and drawings, is produced and quality assured to professional standards from bodies such as the Engineering Council, IMechE and IET.</a:t>
+            </a:r>
+          </a:p>
+          <a:p>
+            <a:pPr>
+              <a:spcAft>
+                <a:spcPts val="1320"/>
+              </a:spcAft>
+            </a:pPr>
+            <a:r>
+              <a:rPr sz="2200" b="0">
+                <a:solidFill>
+                  <a:srgbClr val="202122"/>
+                </a:solidFill>
+                <a:latin typeface="Calibri"/>
+              </a:rPr>
+              <a:t>Completed drawings are checked for quality, technical compliance and completeness before release.</a:t>
+            </a:r>
+          </a:p>
+        </p:txBody>
+      </p:sp>
+      <p:sp>
+        <p:nvSpPr>
+          <p:cNvPr id="7" name="Rounded Rectangle 6"/>
           <p:cNvSpPr/>
           <p:nvPr/>
         </p:nvSpPr>
         <p:spPr>
           <a:xfrm>
-            <a:off x="548640" y="1618488"/>
-            <a:ext cx="411480" cy="411480"/>
+            <a:off x="7772400" y="1554480"/>
+            <a:ext cx="3867912" cy="4526280"/>
+          </a:xfrm>
+          <a:prstGeom prst="roundRect">
+            <a:avLst>
+              <a:gd name="adj" fmla="val 8000"/>
+            </a:avLst>
+          </a:prstGeom>
+          <a:solidFill>
+            <a:srgbClr val="03306E"/>
+          </a:solidFill>
+          <a:ln>
+            <a:noFill/>
+          </a:ln>
+          <a:effectLst/>
+        </p:spPr>
+        <p:style>
+          <a:lnRef idx="1">
+            <a:schemeClr val="accent1"/>
+          </a:lnRef>
+          <a:fillRef idx="3">
+            <a:schemeClr val="accent1"/>
+          </a:fillRef>
+          <a:effectRef idx="2">
+            <a:schemeClr val="accent1"/>
+          </a:effectRef>
+          <a:fontRef idx="minor">
+            <a:schemeClr val="lt1"/>
+          </a:fontRef>
+        </p:style>
+        <p:txBody>
+          <a:bodyPr rtlCol="0" anchor="ctr"/>
+          <a:lstStyle/>
+          <a:p/>
+        </p:txBody>
+      </p:sp>
+      <p:sp>
+        <p:nvSpPr>
+          <p:cNvPr id="8" name="Oval 7"/>
+          <p:cNvSpPr/>
+          <p:nvPr/>
+        </p:nvSpPr>
+        <p:spPr>
+          <a:xfrm>
+            <a:off x="8046720" y="1828800"/>
+            <a:ext cx="548640" cy="548640"/>
           </a:xfrm>
           <a:prstGeom prst="ellipse">
             <a:avLst/>
@@ -7537,110 +9565,13 @@
           <a:p>
             <a:pPr algn="ctr"/>
             <a:r>
-              <a:rPr sz="1400" b="1">
+              <a:rPr sz="1300" b="1">
                 <a:solidFill>
                   <a:srgbClr val="FFFFFF"/>
                 </a:solidFill>
                 <a:latin typeface="Calibri"/>
               </a:rPr>
-              <a:t>1</a:t>
-            </a:r>
-          </a:p>
-        </p:txBody>
-      </p:sp>
-      <p:sp>
-        <p:nvSpPr>
-          <p:cNvPr id="7" name="TextBox 6"/>
-          <p:cNvSpPr txBox="1"/>
-          <p:nvPr/>
-        </p:nvSpPr>
-        <p:spPr>
-          <a:xfrm>
-            <a:off x="1234440" y="1600200"/>
-            <a:ext cx="10408615" cy="1429512"/>
-          </a:xfrm>
-          <a:prstGeom prst="rect">
-            <a:avLst/>
-          </a:prstGeom>
-          <a:noFill/>
-        </p:spPr>
-        <p:txBody>
-          <a:bodyPr wrap="square" anchor="t" lIns="0" rIns="0" tIns="0" bIns="0"/>
-          <a:lstStyle/>
-          <a:p>
-            <a:pPr algn="l"/>
-            <a:r>
-              <a:rPr sz="1800" b="0" i="0">
-                <a:solidFill>
-                  <a:srgbClr val="54595D"/>
-                </a:solidFill>
-                <a:latin typeface="Calibri"/>
-              </a:rPr>
-              <a:t>Name two professional engineering bodies.</a:t>
-            </a:r>
-          </a:p>
-          <a:p>
-            <a:r>
-              <a:rPr sz="1800" b="1">
-                <a:solidFill>
-                  <a:srgbClr val="03306E"/>
-                </a:solidFill>
-                <a:latin typeface="Calibri"/>
-              </a:rPr>
-              <a:t>Any two of: Engineering Council, IMechE, IET.</a:t>
-            </a:r>
-          </a:p>
-        </p:txBody>
-      </p:sp>
-      <p:sp>
-        <p:nvSpPr>
-          <p:cNvPr id="8" name="Oval 7"/>
-          <p:cNvSpPr/>
-          <p:nvPr/>
-        </p:nvSpPr>
-        <p:spPr>
-          <a:xfrm>
-            <a:off x="548640" y="3212592"/>
-            <a:ext cx="411480" cy="411480"/>
-          </a:xfrm>
-          <a:prstGeom prst="ellipse">
-            <a:avLst/>
-          </a:prstGeom>
-          <a:solidFill>
-            <a:srgbClr val="E0463A"/>
-          </a:solidFill>
-          <a:ln>
-            <a:noFill/>
-          </a:ln>
-          <a:effectLst/>
-        </p:spPr>
-        <p:style>
-          <a:lnRef idx="1">
-            <a:schemeClr val="accent1"/>
-          </a:lnRef>
-          <a:fillRef idx="3">
-            <a:schemeClr val="accent1"/>
-          </a:fillRef>
-          <a:effectRef idx="2">
-            <a:schemeClr val="accent1"/>
-          </a:effectRef>
-          <a:fontRef idx="minor">
-            <a:schemeClr val="lt1"/>
-          </a:fontRef>
-        </p:style>
-        <p:txBody>
-          <a:bodyPr rtlCol="0" anchor="ctr" lIns="0" rIns="0" tIns="0" bIns="0"/>
-          <a:lstStyle/>
-          <a:p>
-            <a:pPr algn="ctr"/>
-            <a:r>
-              <a:rPr sz="1400" b="1">
-                <a:solidFill>
-                  <a:srgbClr val="FFFFFF"/>
-                </a:solidFill>
-                <a:latin typeface="Calibri"/>
-              </a:rPr>
-              <a:t>2</a:t>
+              <a:t>e.g.</a:t>
             </a:r>
           </a:p>
         </p:txBody>
@@ -7653,8 +9584,8 @@
         </p:nvSpPr>
         <p:spPr>
           <a:xfrm>
-            <a:off x="1234440" y="3194304"/>
-            <a:ext cx="10408615" cy="1429512"/>
+            <a:off x="8046720" y="2560320"/>
+            <a:ext cx="3291840" cy="365760"/>
           </a:xfrm>
           <a:prstGeom prst="rect">
             <a:avLst/>
@@ -7667,121 +9598,46 @@
           <a:p>
             <a:pPr algn="l"/>
             <a:r>
-              <a:rPr sz="1800" b="0" i="0">
-                <a:solidFill>
-                  <a:srgbClr val="54595D"/>
-                </a:solidFill>
-                <a:latin typeface="Calibri"/>
-              </a:rPr>
-              <a:t>What should you do in an unfamiliar risky situation?</a:t>
-            </a:r>
-          </a:p>
-          <a:p>
-            <a:r>
-              <a:rPr sz="1800" b="1">
-                <a:solidFill>
-                  <a:srgbClr val="03306E"/>
-                </a:solidFill>
-                <a:latin typeface="Calibri"/>
-              </a:rPr>
-              <a:t>Stop, assess the risk and seek advice.</a:t>
-            </a:r>
-          </a:p>
-        </p:txBody>
-      </p:sp>
-      <p:sp>
-        <p:nvSpPr>
-          <p:cNvPr id="10" name="Oval 9"/>
-          <p:cNvSpPr/>
-          <p:nvPr/>
-        </p:nvSpPr>
-        <p:spPr>
-          <a:xfrm>
-            <a:off x="548640" y="4806695"/>
-            <a:ext cx="411480" cy="411480"/>
-          </a:xfrm>
-          <a:prstGeom prst="ellipse">
-            <a:avLst/>
-          </a:prstGeom>
-          <a:solidFill>
-            <a:srgbClr val="E0463A"/>
-          </a:solidFill>
-          <a:ln>
-            <a:noFill/>
-          </a:ln>
-          <a:effectLst/>
-        </p:spPr>
-        <p:style>
-          <a:lnRef idx="1">
-            <a:schemeClr val="accent1"/>
-          </a:lnRef>
-          <a:fillRef idx="3">
-            <a:schemeClr val="accent1"/>
-          </a:fillRef>
-          <a:effectRef idx="2">
-            <a:schemeClr val="accent1"/>
-          </a:effectRef>
-          <a:fontRef idx="minor">
-            <a:schemeClr val="lt1"/>
-          </a:fontRef>
-        </p:style>
-        <p:txBody>
-          <a:bodyPr rtlCol="0" anchor="ctr" lIns="0" rIns="0" tIns="0" bIns="0"/>
-          <a:lstStyle/>
-          <a:p>
-            <a:pPr algn="ctr"/>
-            <a:r>
-              <a:rPr sz="1400" b="1">
+              <a:rPr sz="1300" b="1" i="0">
+                <a:solidFill>
+                  <a:srgbClr val="A9C8F0"/>
+                </a:solidFill>
+                <a:latin typeface="Calibri"/>
+              </a:rPr>
+              <a:t>EXAMPLE</a:t>
+            </a:r>
+          </a:p>
+        </p:txBody>
+      </p:sp>
+      <p:sp>
+        <p:nvSpPr>
+          <p:cNvPr id="10" name="TextBox 9"/>
+          <p:cNvSpPr txBox="1"/>
+          <p:nvPr/>
+        </p:nvSpPr>
+        <p:spPr>
+          <a:xfrm>
+            <a:off x="8046720" y="2971800"/>
+            <a:ext cx="3291840" cy="2971800"/>
+          </a:xfrm>
+          <a:prstGeom prst="rect">
+            <a:avLst/>
+          </a:prstGeom>
+          <a:noFill/>
+        </p:spPr>
+        <p:txBody>
+          <a:bodyPr wrap="square" anchor="t" lIns="0" rIns="0" tIns="0" bIns="0"/>
+          <a:lstStyle/>
+          <a:p>
+            <a:pPr algn="l"/>
+            <a:r>
+              <a:rPr sz="1900" b="0" i="0">
                 <a:solidFill>
                   <a:srgbClr val="FFFFFF"/>
                 </a:solidFill>
-                <a:latin typeface="Calibri"/>
-              </a:rPr>
-              <a:t>3</a:t>
-            </a:r>
-          </a:p>
-        </p:txBody>
-      </p:sp>
-      <p:sp>
-        <p:nvSpPr>
-          <p:cNvPr id="11" name="TextBox 10"/>
-          <p:cNvSpPr txBox="1"/>
-          <p:nvPr/>
-        </p:nvSpPr>
-        <p:spPr>
-          <a:xfrm>
-            <a:off x="1234440" y="4788408"/>
-            <a:ext cx="10408615" cy="1429512"/>
-          </a:xfrm>
-          <a:prstGeom prst="rect">
-            <a:avLst/>
-          </a:prstGeom>
-          <a:noFill/>
-        </p:spPr>
-        <p:txBody>
-          <a:bodyPr wrap="square" anchor="t" lIns="0" rIns="0" tIns="0" bIns="0"/>
-          <a:lstStyle/>
-          <a:p>
-            <a:pPr algn="l"/>
-            <a:r>
-              <a:rPr sz="1800" b="0" i="0">
-                <a:solidFill>
-                  <a:srgbClr val="54595D"/>
-                </a:solidFill>
-                <a:latin typeface="Calibri"/>
-              </a:rPr>
-              <a:t>What does quality assuring a drawing involve?</a:t>
-            </a:r>
-          </a:p>
-          <a:p>
-            <a:r>
-              <a:rPr sz="1800" b="1">
-                <a:solidFill>
-                  <a:srgbClr val="03306E"/>
-                </a:solidFill>
-                <a:latin typeface="Calibri"/>
-              </a:rPr>
-              <a:t>Checking accuracy, technical compliance and completeness.</a:t>
+                <a:latin typeface="Cambria"/>
+              </a:rPr>
+              <a:t>A drawing checker spots a missing tolerance on a bearing bore before release, avoiding a batch of unusable parts.</a:t>
             </a:r>
           </a:p>
         </p:txBody>
@@ -7873,7 +9729,7 @@
                 </a:solidFill>
                 <a:latin typeface="Cambria"/>
               </a:rPr>
-              <a:t>Activity: Peer check</a:t>
+              <a:t>Testing and quality assuring</a:t>
             </a:r>
           </a:p>
         </p:txBody>
@@ -7946,19 +9802,59 @@
       </p:sp>
       <p:sp>
         <p:nvSpPr>
-          <p:cNvPr id="6" name="Rounded Rectangle 5"/>
+          <p:cNvPr id="6" name="Rectangle 5"/>
           <p:cNvSpPr/>
           <p:nvPr/>
         </p:nvSpPr>
         <p:spPr>
           <a:xfrm>
-            <a:off x="548640" y="1508760"/>
-            <a:ext cx="2011680" cy="457200"/>
-          </a:xfrm>
-          <a:prstGeom prst="roundRect">
-            <a:avLst>
-              <a:gd name="adj" fmla="val 50000"/>
-            </a:avLst>
+            <a:off x="1884006" y="2793492"/>
+            <a:ext cx="8423681" cy="36576"/>
+          </a:xfrm>
+          <a:prstGeom prst="rect">
+            <a:avLst/>
+          </a:prstGeom>
+          <a:solidFill>
+            <a:srgbClr val="A9C8F0"/>
+          </a:solidFill>
+          <a:ln>
+            <a:noFill/>
+          </a:ln>
+          <a:effectLst/>
+        </p:spPr>
+        <p:style>
+          <a:lnRef idx="1">
+            <a:schemeClr val="accent1"/>
+          </a:lnRef>
+          <a:fillRef idx="3">
+            <a:schemeClr val="accent1"/>
+          </a:fillRef>
+          <a:effectRef idx="2">
+            <a:schemeClr val="accent1"/>
+          </a:effectRef>
+          <a:fontRef idx="minor">
+            <a:schemeClr val="lt1"/>
+          </a:fontRef>
+        </p:style>
+        <p:txBody>
+          <a:bodyPr rtlCol="0" anchor="ctr"/>
+          <a:lstStyle/>
+          <a:p/>
+        </p:txBody>
+      </p:sp>
+      <p:sp>
+        <p:nvSpPr>
+          <p:cNvPr id="7" name="Oval 6"/>
+          <p:cNvSpPr/>
+          <p:nvPr/>
+        </p:nvSpPr>
+        <p:spPr>
+          <a:xfrm>
+            <a:off x="1563966" y="2491740"/>
+            <a:ext cx="640080" cy="640080"/>
+          </a:xfrm>
+          <a:prstGeom prst="ellipse">
+            <a:avLst/>
           </a:prstGeom>
           <a:solidFill>
             <a:srgbClr val="E0463A"/>
@@ -7983,40 +9879,18 @@
           </a:fontRef>
         </p:style>
         <p:txBody>
-          <a:bodyPr rtlCol="0" anchor="ctr"/>
-          <a:lstStyle/>
-          <a:p/>
-        </p:txBody>
-      </p:sp>
-      <p:sp>
-        <p:nvSpPr>
-          <p:cNvPr id="7" name="TextBox 6"/>
-          <p:cNvSpPr txBox="1"/>
-          <p:nvPr/>
-        </p:nvSpPr>
-        <p:spPr>
-          <a:xfrm>
-            <a:off x="548640" y="1508760"/>
-            <a:ext cx="2011680" cy="457200"/>
-          </a:xfrm>
-          <a:prstGeom prst="rect">
-            <a:avLst/>
-          </a:prstGeom>
-          <a:noFill/>
-        </p:spPr>
-        <p:txBody>
-          <a:bodyPr wrap="square" anchor="ctr" lIns="0" rIns="0" tIns="0" bIns="0"/>
+          <a:bodyPr rtlCol="0" anchor="ctr" lIns="0" rIns="0" tIns="0" bIns="0"/>
           <a:lstStyle/>
           <a:p>
             <a:pPr algn="ctr"/>
             <a:r>
-              <a:rPr sz="1400" b="1" i="0">
+              <a:rPr sz="2000" b="1">
                 <a:solidFill>
                   <a:srgbClr val="FFFFFF"/>
                 </a:solidFill>
                 <a:latin typeface="Calibri"/>
               </a:rPr>
-              <a:t>25 minutes</a:t>
+              <a:t>1</a:t>
             </a:r>
           </a:p>
         </p:txBody>
@@ -8029,8 +9903,8 @@
         </p:nvSpPr>
         <p:spPr>
           <a:xfrm>
-            <a:off x="2743200" y="1508760"/>
-            <a:ext cx="4754880" cy="457200"/>
+            <a:off x="548640" y="3268979"/>
+            <a:ext cx="2670733" cy="731520"/>
           </a:xfrm>
           <a:prstGeom prst="rect">
             <a:avLst/>
@@ -8038,380 +9912,36 @@
           <a:noFill/>
         </p:spPr>
         <p:txBody>
-          <a:bodyPr wrap="square" anchor="ctr" lIns="0" rIns="0" tIns="0" bIns="0"/>
-          <a:lstStyle/>
-          <a:p>
-            <a:pPr algn="l"/>
-            <a:r>
-              <a:rPr sz="1400" b="0" i="1">
-                <a:solidFill>
-                  <a:srgbClr val="54595D"/>
-                </a:solidFill>
-                <a:latin typeface="Calibri"/>
-              </a:rPr>
-              <a:t>Pairs</a:t>
-            </a:r>
-          </a:p>
-        </p:txBody>
-      </p:sp>
-      <p:sp>
-        <p:nvSpPr>
-          <p:cNvPr id="9" name="Oval 8"/>
+          <a:bodyPr wrap="square" anchor="t" lIns="0" rIns="0" tIns="0" bIns="0"/>
+          <a:lstStyle/>
+          <a:p>
+            <a:pPr algn="ctr"/>
+            <a:r>
+              <a:rPr sz="1700" b="1" i="0">
+                <a:solidFill>
+                  <a:srgbClr val="03306E"/>
+                </a:solidFill>
+                <a:latin typeface="Calibri"/>
+              </a:rPr>
+              <a:t>Model</a:t>
+            </a:r>
+          </a:p>
+        </p:txBody>
+      </p:sp>
+      <p:sp>
+        <p:nvSpPr>
+          <p:cNvPr id="9" name="Rounded Rectangle 8"/>
           <p:cNvSpPr/>
           <p:nvPr/>
         </p:nvSpPr>
         <p:spPr>
           <a:xfrm>
-            <a:off x="548640" y="2482596"/>
-            <a:ext cx="384048" cy="384048"/>
-          </a:xfrm>
-          <a:prstGeom prst="ellipse">
-            <a:avLst/>
-          </a:prstGeom>
-          <a:solidFill>
-            <a:srgbClr val="0645AD"/>
-          </a:solidFill>
-          <a:ln>
-            <a:noFill/>
-          </a:ln>
-          <a:effectLst/>
-        </p:spPr>
-        <p:style>
-          <a:lnRef idx="1">
-            <a:schemeClr val="accent1"/>
-          </a:lnRef>
-          <a:fillRef idx="3">
-            <a:schemeClr val="accent1"/>
-          </a:fillRef>
-          <a:effectRef idx="2">
-            <a:schemeClr val="accent1"/>
-          </a:effectRef>
-          <a:fontRef idx="minor">
-            <a:schemeClr val="lt1"/>
-          </a:fontRef>
-        </p:style>
-        <p:txBody>
-          <a:bodyPr rtlCol="0" anchor="ctr" lIns="0" rIns="0" tIns="0" bIns="0"/>
-          <a:lstStyle/>
-          <a:p>
-            <a:pPr algn="ctr"/>
-            <a:r>
-              <a:rPr sz="1300" b="1">
-                <a:solidFill>
-                  <a:srgbClr val="FFFFFF"/>
-                </a:solidFill>
-                <a:latin typeface="Calibri"/>
-              </a:rPr>
-              <a:t>1</a:t>
-            </a:r>
-          </a:p>
-        </p:txBody>
-      </p:sp>
-      <p:sp>
-        <p:nvSpPr>
-          <p:cNvPr id="10" name="TextBox 9"/>
-          <p:cNvSpPr txBox="1"/>
-          <p:nvPr/>
-        </p:nvSpPr>
-        <p:spPr>
-          <a:xfrm>
-            <a:off x="1143000" y="2240280"/>
-            <a:ext cx="5943600" cy="868680"/>
-          </a:xfrm>
-          <a:prstGeom prst="rect">
-            <a:avLst/>
-          </a:prstGeom>
-          <a:noFill/>
-        </p:spPr>
-        <p:txBody>
-          <a:bodyPr wrap="square" anchor="ctr" lIns="0" rIns="0" tIns="0" bIns="0"/>
-          <a:lstStyle/>
-          <a:p>
-            <a:pPr algn="l"/>
-            <a:r>
-              <a:rPr sz="1700" b="0" i="0">
-                <a:solidFill>
-                  <a:srgbClr val="202122"/>
-                </a:solidFill>
-                <a:latin typeface="Calibri"/>
-              </a:rPr>
-              <a:t>Swap a drawing you produced with a partner.</a:t>
-            </a:r>
-          </a:p>
-        </p:txBody>
-      </p:sp>
-      <p:sp>
-        <p:nvSpPr>
-          <p:cNvPr id="11" name="Oval 10"/>
-          <p:cNvSpPr/>
-          <p:nvPr/>
-        </p:nvSpPr>
-        <p:spPr>
-          <a:xfrm>
-            <a:off x="548640" y="3461004"/>
-            <a:ext cx="384048" cy="384048"/>
-          </a:xfrm>
-          <a:prstGeom prst="ellipse">
-            <a:avLst/>
-          </a:prstGeom>
-          <a:solidFill>
-            <a:srgbClr val="0645AD"/>
-          </a:solidFill>
-          <a:ln>
-            <a:noFill/>
-          </a:ln>
-          <a:effectLst/>
-        </p:spPr>
-        <p:style>
-          <a:lnRef idx="1">
-            <a:schemeClr val="accent1"/>
-          </a:lnRef>
-          <a:fillRef idx="3">
-            <a:schemeClr val="accent1"/>
-          </a:fillRef>
-          <a:effectRef idx="2">
-            <a:schemeClr val="accent1"/>
-          </a:effectRef>
-          <a:fontRef idx="minor">
-            <a:schemeClr val="lt1"/>
-          </a:fontRef>
-        </p:style>
-        <p:txBody>
-          <a:bodyPr rtlCol="0" anchor="ctr" lIns="0" rIns="0" tIns="0" bIns="0"/>
-          <a:lstStyle/>
-          <a:p>
-            <a:pPr algn="ctr"/>
-            <a:r>
-              <a:rPr sz="1300" b="1">
-                <a:solidFill>
-                  <a:srgbClr val="FFFFFF"/>
-                </a:solidFill>
-                <a:latin typeface="Calibri"/>
-              </a:rPr>
-              <a:t>2</a:t>
-            </a:r>
-          </a:p>
-        </p:txBody>
-      </p:sp>
-      <p:sp>
-        <p:nvSpPr>
-          <p:cNvPr id="12" name="TextBox 11"/>
-          <p:cNvSpPr txBox="1"/>
-          <p:nvPr/>
-        </p:nvSpPr>
-        <p:spPr>
-          <a:xfrm>
-            <a:off x="1143000" y="3218688"/>
-            <a:ext cx="5943600" cy="868680"/>
-          </a:xfrm>
-          <a:prstGeom prst="rect">
-            <a:avLst/>
-          </a:prstGeom>
-          <a:noFill/>
-        </p:spPr>
-        <p:txBody>
-          <a:bodyPr wrap="square" anchor="ctr" lIns="0" rIns="0" tIns="0" bIns="0"/>
-          <a:lstStyle/>
-          <a:p>
-            <a:pPr algn="l"/>
-            <a:r>
-              <a:rPr sz="1700" b="0" i="0">
-                <a:solidFill>
-                  <a:srgbClr val="202122"/>
-                </a:solidFill>
-                <a:latin typeface="Calibri"/>
-              </a:rPr>
-              <a:t>Check it against a quality checklist.</a:t>
-            </a:r>
-          </a:p>
-        </p:txBody>
-      </p:sp>
-      <p:sp>
-        <p:nvSpPr>
-          <p:cNvPr id="13" name="Oval 12"/>
-          <p:cNvSpPr/>
-          <p:nvPr/>
-        </p:nvSpPr>
-        <p:spPr>
-          <a:xfrm>
-            <a:off x="548640" y="4439412"/>
-            <a:ext cx="384048" cy="384048"/>
-          </a:xfrm>
-          <a:prstGeom prst="ellipse">
-            <a:avLst/>
-          </a:prstGeom>
-          <a:solidFill>
-            <a:srgbClr val="0645AD"/>
-          </a:solidFill>
-          <a:ln>
-            <a:noFill/>
-          </a:ln>
-          <a:effectLst/>
-        </p:spPr>
-        <p:style>
-          <a:lnRef idx="1">
-            <a:schemeClr val="accent1"/>
-          </a:lnRef>
-          <a:fillRef idx="3">
-            <a:schemeClr val="accent1"/>
-          </a:fillRef>
-          <a:effectRef idx="2">
-            <a:schemeClr val="accent1"/>
-          </a:effectRef>
-          <a:fontRef idx="minor">
-            <a:schemeClr val="lt1"/>
-          </a:fontRef>
-        </p:style>
-        <p:txBody>
-          <a:bodyPr rtlCol="0" anchor="ctr" lIns="0" rIns="0" tIns="0" bIns="0"/>
-          <a:lstStyle/>
-          <a:p>
-            <a:pPr algn="ctr"/>
-            <a:r>
-              <a:rPr sz="1300" b="1">
-                <a:solidFill>
-                  <a:srgbClr val="FFFFFF"/>
-                </a:solidFill>
-                <a:latin typeface="Calibri"/>
-              </a:rPr>
-              <a:t>3</a:t>
-            </a:r>
-          </a:p>
-        </p:txBody>
-      </p:sp>
-      <p:sp>
-        <p:nvSpPr>
-          <p:cNvPr id="14" name="TextBox 13"/>
-          <p:cNvSpPr txBox="1"/>
-          <p:nvPr/>
-        </p:nvSpPr>
-        <p:spPr>
-          <a:xfrm>
-            <a:off x="1143000" y="4197096"/>
-            <a:ext cx="5943600" cy="868680"/>
-          </a:xfrm>
-          <a:prstGeom prst="rect">
-            <a:avLst/>
-          </a:prstGeom>
-          <a:noFill/>
-        </p:spPr>
-        <p:txBody>
-          <a:bodyPr wrap="square" anchor="ctr" lIns="0" rIns="0" tIns="0" bIns="0"/>
-          <a:lstStyle/>
-          <a:p>
-            <a:pPr algn="l"/>
-            <a:r>
-              <a:rPr sz="1700" b="0" i="0">
-                <a:solidFill>
-                  <a:srgbClr val="202122"/>
-                </a:solidFill>
-                <a:latin typeface="Calibri"/>
-              </a:rPr>
-              <a:t>Give feedback professionally.</a:t>
-            </a:r>
-          </a:p>
-        </p:txBody>
-      </p:sp>
-      <p:sp>
-        <p:nvSpPr>
-          <p:cNvPr id="15" name="Oval 14"/>
-          <p:cNvSpPr/>
-          <p:nvPr/>
-        </p:nvSpPr>
-        <p:spPr>
-          <a:xfrm>
-            <a:off x="548640" y="5417820"/>
-            <a:ext cx="384048" cy="384048"/>
-          </a:xfrm>
-          <a:prstGeom prst="ellipse">
-            <a:avLst/>
-          </a:prstGeom>
-          <a:solidFill>
-            <a:srgbClr val="0645AD"/>
-          </a:solidFill>
-          <a:ln>
-            <a:noFill/>
-          </a:ln>
-          <a:effectLst/>
-        </p:spPr>
-        <p:style>
-          <a:lnRef idx="1">
-            <a:schemeClr val="accent1"/>
-          </a:lnRef>
-          <a:fillRef idx="3">
-            <a:schemeClr val="accent1"/>
-          </a:fillRef>
-          <a:effectRef idx="2">
-            <a:schemeClr val="accent1"/>
-          </a:effectRef>
-          <a:fontRef idx="minor">
-            <a:schemeClr val="lt1"/>
-          </a:fontRef>
-        </p:style>
-        <p:txBody>
-          <a:bodyPr rtlCol="0" anchor="ctr" lIns="0" rIns="0" tIns="0" bIns="0"/>
-          <a:lstStyle/>
-          <a:p>
-            <a:pPr algn="ctr"/>
-            <a:r>
-              <a:rPr sz="1300" b="1">
-                <a:solidFill>
-                  <a:srgbClr val="FFFFFF"/>
-                </a:solidFill>
-                <a:latin typeface="Calibri"/>
-              </a:rPr>
-              <a:t>4</a:t>
-            </a:r>
-          </a:p>
-        </p:txBody>
-      </p:sp>
-      <p:sp>
-        <p:nvSpPr>
-          <p:cNvPr id="16" name="TextBox 15"/>
-          <p:cNvSpPr txBox="1"/>
-          <p:nvPr/>
-        </p:nvSpPr>
-        <p:spPr>
-          <a:xfrm>
-            <a:off x="1143000" y="5175504"/>
-            <a:ext cx="5943600" cy="868680"/>
-          </a:xfrm>
-          <a:prstGeom prst="rect">
-            <a:avLst/>
-          </a:prstGeom>
-          <a:noFill/>
-        </p:spPr>
-        <p:txBody>
-          <a:bodyPr wrap="square" anchor="ctr" lIns="0" rIns="0" tIns="0" bIns="0"/>
-          <a:lstStyle/>
-          <a:p>
-            <a:pPr algn="l"/>
-            <a:r>
-              <a:rPr sz="1700" b="0" i="0">
-                <a:solidFill>
-                  <a:srgbClr val="202122"/>
-                </a:solidFill>
-                <a:latin typeface="Calibri"/>
-              </a:rPr>
-              <a:t>Correct your own drawing from the feedback.</a:t>
-            </a:r>
-          </a:p>
-        </p:txBody>
-      </p:sp>
-      <p:sp>
-        <p:nvSpPr>
-          <p:cNvPr id="17" name="Rounded Rectangle 16"/>
-          <p:cNvSpPr/>
-          <p:nvPr/>
-        </p:nvSpPr>
-        <p:spPr>
-          <a:xfrm>
-            <a:off x="7772400" y="1508760"/>
-            <a:ext cx="3867912" cy="4572000"/>
+            <a:off x="548640" y="4046220"/>
+            <a:ext cx="2670733" cy="1234439"/>
           </a:xfrm>
           <a:prstGeom prst="roundRect">
             <a:avLst>
-              <a:gd name="adj" fmla="val 8000"/>
+              <a:gd name="adj" fmla="val 6000"/>
             </a:avLst>
           </a:prstGeom>
           <a:solidFill>
@@ -8444,14 +9974,340 @@
       </p:sp>
       <p:sp>
         <p:nvSpPr>
+          <p:cNvPr id="10" name="TextBox 9"/>
+          <p:cNvSpPr txBox="1"/>
+          <p:nvPr/>
+        </p:nvSpPr>
+        <p:spPr>
+          <a:xfrm>
+            <a:off x="685800" y="4183380"/>
+            <a:ext cx="2396413" cy="960119"/>
+          </a:xfrm>
+          <a:prstGeom prst="rect">
+            <a:avLst/>
+          </a:prstGeom>
+          <a:noFill/>
+        </p:spPr>
+        <p:txBody>
+          <a:bodyPr wrap="square" anchor="t" lIns="0" rIns="0" tIns="0" bIns="0"/>
+          <a:lstStyle/>
+          <a:p>
+            <a:pPr algn="l"/>
+            <a:r>
+              <a:rPr sz="1800" b="0" i="0">
+                <a:solidFill>
+                  <a:srgbClr val="202122"/>
+                </a:solidFill>
+                <a:latin typeface="Calibri"/>
+              </a:rPr>
+              <a:t>Virtual or physical models and prototypes.</a:t>
+            </a:r>
+          </a:p>
+        </p:txBody>
+      </p:sp>
+      <p:sp>
+        <p:nvSpPr>
+          <p:cNvPr id="11" name="Oval 10"/>
+          <p:cNvSpPr/>
+          <p:nvPr/>
+        </p:nvSpPr>
+        <p:spPr>
+          <a:xfrm>
+            <a:off x="4371860" y="2491740"/>
+            <a:ext cx="640080" cy="640080"/>
+          </a:xfrm>
+          <a:prstGeom prst="ellipse">
+            <a:avLst/>
+          </a:prstGeom>
+          <a:solidFill>
+            <a:srgbClr val="E0463A"/>
+          </a:solidFill>
+          <a:ln>
+            <a:noFill/>
+          </a:ln>
+          <a:effectLst/>
+        </p:spPr>
+        <p:style>
+          <a:lnRef idx="1">
+            <a:schemeClr val="accent1"/>
+          </a:lnRef>
+          <a:fillRef idx="3">
+            <a:schemeClr val="accent1"/>
+          </a:fillRef>
+          <a:effectRef idx="2">
+            <a:schemeClr val="accent1"/>
+          </a:effectRef>
+          <a:fontRef idx="minor">
+            <a:schemeClr val="lt1"/>
+          </a:fontRef>
+        </p:style>
+        <p:txBody>
+          <a:bodyPr rtlCol="0" anchor="ctr" lIns="0" rIns="0" tIns="0" bIns="0"/>
+          <a:lstStyle/>
+          <a:p>
+            <a:pPr algn="ctr"/>
+            <a:r>
+              <a:rPr sz="2000" b="1">
+                <a:solidFill>
+                  <a:srgbClr val="FFFFFF"/>
+                </a:solidFill>
+                <a:latin typeface="Calibri"/>
+              </a:rPr>
+              <a:t>2</a:t>
+            </a:r>
+          </a:p>
+        </p:txBody>
+      </p:sp>
+      <p:sp>
+        <p:nvSpPr>
+          <p:cNvPr id="12" name="TextBox 11"/>
+          <p:cNvSpPr txBox="1"/>
+          <p:nvPr/>
+        </p:nvSpPr>
+        <p:spPr>
+          <a:xfrm>
+            <a:off x="3356533" y="3268979"/>
+            <a:ext cx="2670733" cy="731520"/>
+          </a:xfrm>
+          <a:prstGeom prst="rect">
+            <a:avLst/>
+          </a:prstGeom>
+          <a:noFill/>
+        </p:spPr>
+        <p:txBody>
+          <a:bodyPr wrap="square" anchor="t" lIns="0" rIns="0" tIns="0" bIns="0"/>
+          <a:lstStyle/>
+          <a:p>
+            <a:pPr algn="ctr"/>
+            <a:r>
+              <a:rPr sz="1700" b="1" i="0">
+                <a:solidFill>
+                  <a:srgbClr val="03306E"/>
+                </a:solidFill>
+                <a:latin typeface="Calibri"/>
+              </a:rPr>
+              <a:t>Test</a:t>
+            </a:r>
+          </a:p>
+        </p:txBody>
+      </p:sp>
+      <p:sp>
+        <p:nvSpPr>
+          <p:cNvPr id="13" name="Rounded Rectangle 12"/>
+          <p:cNvSpPr/>
+          <p:nvPr/>
+        </p:nvSpPr>
+        <p:spPr>
+          <a:xfrm>
+            <a:off x="3356533" y="4046220"/>
+            <a:ext cx="2670733" cy="1234439"/>
+          </a:xfrm>
+          <a:prstGeom prst="roundRect">
+            <a:avLst>
+              <a:gd name="adj" fmla="val 6000"/>
+            </a:avLst>
+          </a:prstGeom>
+          <a:solidFill>
+            <a:srgbClr val="EAF3FF"/>
+          </a:solidFill>
+          <a:ln>
+            <a:noFill/>
+          </a:ln>
+          <a:effectLst/>
+        </p:spPr>
+        <p:style>
+          <a:lnRef idx="1">
+            <a:schemeClr val="accent1"/>
+          </a:lnRef>
+          <a:fillRef idx="3">
+            <a:schemeClr val="accent1"/>
+          </a:fillRef>
+          <a:effectRef idx="2">
+            <a:schemeClr val="accent1"/>
+          </a:effectRef>
+          <a:fontRef idx="minor">
+            <a:schemeClr val="lt1"/>
+          </a:fontRef>
+        </p:style>
+        <p:txBody>
+          <a:bodyPr rtlCol="0" anchor="ctr"/>
+          <a:lstStyle/>
+          <a:p/>
+        </p:txBody>
+      </p:sp>
+      <p:sp>
+        <p:nvSpPr>
+          <p:cNvPr id="14" name="TextBox 13"/>
+          <p:cNvSpPr txBox="1"/>
+          <p:nvPr/>
+        </p:nvSpPr>
+        <p:spPr>
+          <a:xfrm>
+            <a:off x="3493693" y="4183380"/>
+            <a:ext cx="2396413" cy="960119"/>
+          </a:xfrm>
+          <a:prstGeom prst="rect">
+            <a:avLst/>
+          </a:prstGeom>
+          <a:noFill/>
+        </p:spPr>
+        <p:txBody>
+          <a:bodyPr wrap="square" anchor="t" lIns="0" rIns="0" tIns="0" bIns="0"/>
+          <a:lstStyle/>
+          <a:p>
+            <a:pPr algn="l"/>
+            <a:r>
+              <a:rPr sz="1800" b="0" i="0">
+                <a:solidFill>
+                  <a:srgbClr val="202122"/>
+                </a:solidFill>
+                <a:latin typeface="Calibri"/>
+              </a:rPr>
+              <a:t>Concept, functional, measurement, visual inspection.</a:t>
+            </a:r>
+          </a:p>
+        </p:txBody>
+      </p:sp>
+      <p:sp>
+        <p:nvSpPr>
+          <p:cNvPr id="15" name="Oval 14"/>
+          <p:cNvSpPr/>
+          <p:nvPr/>
+        </p:nvSpPr>
+        <p:spPr>
+          <a:xfrm>
+            <a:off x="7179754" y="2491740"/>
+            <a:ext cx="640080" cy="640080"/>
+          </a:xfrm>
+          <a:prstGeom prst="ellipse">
+            <a:avLst/>
+          </a:prstGeom>
+          <a:solidFill>
+            <a:srgbClr val="E0463A"/>
+          </a:solidFill>
+          <a:ln>
+            <a:noFill/>
+          </a:ln>
+          <a:effectLst/>
+        </p:spPr>
+        <p:style>
+          <a:lnRef idx="1">
+            <a:schemeClr val="accent1"/>
+          </a:lnRef>
+          <a:fillRef idx="3">
+            <a:schemeClr val="accent1"/>
+          </a:fillRef>
+          <a:effectRef idx="2">
+            <a:schemeClr val="accent1"/>
+          </a:effectRef>
+          <a:fontRef idx="minor">
+            <a:schemeClr val="lt1"/>
+          </a:fontRef>
+        </p:style>
+        <p:txBody>
+          <a:bodyPr rtlCol="0" anchor="ctr" lIns="0" rIns="0" tIns="0" bIns="0"/>
+          <a:lstStyle/>
+          <a:p>
+            <a:pPr algn="ctr"/>
+            <a:r>
+              <a:rPr sz="2000" b="1">
+                <a:solidFill>
+                  <a:srgbClr val="FFFFFF"/>
+                </a:solidFill>
+                <a:latin typeface="Calibri"/>
+              </a:rPr>
+              <a:t>3</a:t>
+            </a:r>
+          </a:p>
+        </p:txBody>
+      </p:sp>
+      <p:sp>
+        <p:nvSpPr>
+          <p:cNvPr id="16" name="TextBox 15"/>
+          <p:cNvSpPr txBox="1"/>
+          <p:nvPr/>
+        </p:nvSpPr>
+        <p:spPr>
+          <a:xfrm>
+            <a:off x="6164427" y="3268979"/>
+            <a:ext cx="2670733" cy="731520"/>
+          </a:xfrm>
+          <a:prstGeom prst="rect">
+            <a:avLst/>
+          </a:prstGeom>
+          <a:noFill/>
+        </p:spPr>
+        <p:txBody>
+          <a:bodyPr wrap="square" anchor="t" lIns="0" rIns="0" tIns="0" bIns="0"/>
+          <a:lstStyle/>
+          <a:p>
+            <a:pPr algn="ctr"/>
+            <a:r>
+              <a:rPr sz="1700" b="1" i="0">
+                <a:solidFill>
+                  <a:srgbClr val="03306E"/>
+                </a:solidFill>
+                <a:latin typeface="Calibri"/>
+              </a:rPr>
+              <a:t>Report</a:t>
+            </a:r>
+          </a:p>
+        </p:txBody>
+      </p:sp>
+      <p:sp>
+        <p:nvSpPr>
+          <p:cNvPr id="17" name="Rounded Rectangle 16"/>
+          <p:cNvSpPr/>
+          <p:nvPr/>
+        </p:nvSpPr>
+        <p:spPr>
+          <a:xfrm>
+            <a:off x="6164427" y="4046220"/>
+            <a:ext cx="2670733" cy="1234439"/>
+          </a:xfrm>
+          <a:prstGeom prst="roundRect">
+            <a:avLst>
+              <a:gd name="adj" fmla="val 6000"/>
+            </a:avLst>
+          </a:prstGeom>
+          <a:solidFill>
+            <a:srgbClr val="EAF3FF"/>
+          </a:solidFill>
+          <a:ln>
+            <a:noFill/>
+          </a:ln>
+          <a:effectLst/>
+        </p:spPr>
+        <p:style>
+          <a:lnRef idx="1">
+            <a:schemeClr val="accent1"/>
+          </a:lnRef>
+          <a:fillRef idx="3">
+            <a:schemeClr val="accent1"/>
+          </a:fillRef>
+          <a:effectRef idx="2">
+            <a:schemeClr val="accent1"/>
+          </a:effectRef>
+          <a:fontRef idx="minor">
+            <a:schemeClr val="lt1"/>
+          </a:fontRef>
+        </p:style>
+        <p:txBody>
+          <a:bodyPr rtlCol="0" anchor="ctr"/>
+          <a:lstStyle/>
+          <a:p/>
+        </p:txBody>
+      </p:sp>
+      <p:sp>
+        <p:nvSpPr>
           <p:cNvPr id="18" name="TextBox 17"/>
           <p:cNvSpPr txBox="1"/>
           <p:nvPr/>
         </p:nvSpPr>
         <p:spPr>
           <a:xfrm>
-            <a:off x="8046720" y="1737360"/>
-            <a:ext cx="3291840" cy="365760"/>
+            <a:off x="6301587" y="4183380"/>
+            <a:ext cx="2396413" cy="960119"/>
           </a:xfrm>
           <a:prstGeom prst="rect">
             <a:avLst/>
@@ -8464,27 +10320,80 @@
           <a:p>
             <a:pPr algn="l"/>
             <a:r>
-              <a:rPr sz="1300" b="1" i="0">
-                <a:solidFill>
-                  <a:srgbClr val="0645AD"/>
-                </a:solidFill>
-                <a:latin typeface="Calibri"/>
-              </a:rPr>
-              <a:t>SUCCESS CRITERIA</a:t>
-            </a:r>
-          </a:p>
-        </p:txBody>
-      </p:sp>
-      <p:sp>
-        <p:nvSpPr>
-          <p:cNvPr id="19" name="TextBox 18"/>
+              <a:rPr sz="1800" b="0" i="0">
+                <a:solidFill>
+                  <a:srgbClr val="202122"/>
+                </a:solidFill>
+                <a:latin typeface="Calibri"/>
+              </a:rPr>
+              <a:t>Record and respond to results.</a:t>
+            </a:r>
+          </a:p>
+        </p:txBody>
+      </p:sp>
+      <p:sp>
+        <p:nvSpPr>
+          <p:cNvPr id="19" name="Oval 18"/>
+          <p:cNvSpPr/>
+          <p:nvPr/>
+        </p:nvSpPr>
+        <p:spPr>
+          <a:xfrm>
+            <a:off x="9987648" y="2491740"/>
+            <a:ext cx="640080" cy="640080"/>
+          </a:xfrm>
+          <a:prstGeom prst="ellipse">
+            <a:avLst/>
+          </a:prstGeom>
+          <a:solidFill>
+            <a:srgbClr val="E0463A"/>
+          </a:solidFill>
+          <a:ln>
+            <a:noFill/>
+          </a:ln>
+          <a:effectLst/>
+        </p:spPr>
+        <p:style>
+          <a:lnRef idx="1">
+            <a:schemeClr val="accent1"/>
+          </a:lnRef>
+          <a:fillRef idx="3">
+            <a:schemeClr val="accent1"/>
+          </a:fillRef>
+          <a:effectRef idx="2">
+            <a:schemeClr val="accent1"/>
+          </a:effectRef>
+          <a:fontRef idx="minor">
+            <a:schemeClr val="lt1"/>
+          </a:fontRef>
+        </p:style>
+        <p:txBody>
+          <a:bodyPr rtlCol="0" anchor="ctr" lIns="0" rIns="0" tIns="0" bIns="0"/>
+          <a:lstStyle/>
+          <a:p>
+            <a:pPr algn="ctr"/>
+            <a:r>
+              <a:rPr sz="2000" b="1">
+                <a:solidFill>
+                  <a:srgbClr val="FFFFFF"/>
+                </a:solidFill>
+                <a:latin typeface="Calibri"/>
+              </a:rPr>
+              <a:t>4</a:t>
+            </a:r>
+          </a:p>
+        </p:txBody>
+      </p:sp>
+      <p:sp>
+        <p:nvSpPr>
+          <p:cNvPr id="20" name="TextBox 19"/>
           <p:cNvSpPr txBox="1"/>
           <p:nvPr/>
         </p:nvSpPr>
         <p:spPr>
           <a:xfrm>
-            <a:off x="8046720" y="2240280"/>
-            <a:ext cx="3337560" cy="3657600"/>
+            <a:off x="8972321" y="3268979"/>
+            <a:ext cx="2670733" cy="731520"/>
           </a:xfrm>
           <a:prstGeom prst="rect">
             <a:avLst/>
@@ -8492,71 +10401,95 @@
           <a:noFill/>
         </p:spPr>
         <p:txBody>
-          <a:bodyPr wrap="square" lIns="0" rIns="0" tIns="0" bIns="0">
-            <a:spAutoFit/>
-          </a:bodyPr>
-          <a:lstStyle/>
-          <a:p>
-            <a:pPr marL="274320" indent="-274320">
-              <a:spcAft>
-                <a:spcPts val="810"/>
-              </a:spcAft>
-              <a:buClr>
-                <a:srgbClr val="0645AD"/>
-              </a:buClr>
-              <a:buFont typeface="Arial"/>
-              <a:buChar char="•"/>
-            </a:pPr>
-            <a:r>
-              <a:rPr sz="1800" b="0">
+          <a:bodyPr wrap="square" anchor="t" lIns="0" rIns="0" tIns="0" bIns="0"/>
+          <a:lstStyle/>
+          <a:p>
+            <a:pPr algn="ctr"/>
+            <a:r>
+              <a:rPr sz="1700" b="1" i="0">
+                <a:solidFill>
+                  <a:srgbClr val="03306E"/>
+                </a:solidFill>
+                <a:latin typeface="Calibri"/>
+              </a:rPr>
+              <a:t>Check</a:t>
+            </a:r>
+          </a:p>
+        </p:txBody>
+      </p:sp>
+      <p:sp>
+        <p:nvSpPr>
+          <p:cNvPr id="21" name="Rounded Rectangle 20"/>
+          <p:cNvSpPr/>
+          <p:nvPr/>
+        </p:nvSpPr>
+        <p:spPr>
+          <a:xfrm>
+            <a:off x="8972321" y="4046220"/>
+            <a:ext cx="2670733" cy="1234439"/>
+          </a:xfrm>
+          <a:prstGeom prst="roundRect">
+            <a:avLst>
+              <a:gd name="adj" fmla="val 6000"/>
+            </a:avLst>
+          </a:prstGeom>
+          <a:solidFill>
+            <a:srgbClr val="EAF3FF"/>
+          </a:solidFill>
+          <a:ln>
+            <a:noFill/>
+          </a:ln>
+          <a:effectLst/>
+        </p:spPr>
+        <p:style>
+          <a:lnRef idx="1">
+            <a:schemeClr val="accent1"/>
+          </a:lnRef>
+          <a:fillRef idx="3">
+            <a:schemeClr val="accent1"/>
+          </a:fillRef>
+          <a:effectRef idx="2">
+            <a:schemeClr val="accent1"/>
+          </a:effectRef>
+          <a:fontRef idx="minor">
+            <a:schemeClr val="lt1"/>
+          </a:fontRef>
+        </p:style>
+        <p:txBody>
+          <a:bodyPr rtlCol="0" anchor="ctr"/>
+          <a:lstStyle/>
+          <a:p/>
+        </p:txBody>
+      </p:sp>
+      <p:sp>
+        <p:nvSpPr>
+          <p:cNvPr id="22" name="TextBox 21"/>
+          <p:cNvSpPr txBox="1"/>
+          <p:nvPr/>
+        </p:nvSpPr>
+        <p:spPr>
+          <a:xfrm>
+            <a:off x="9109481" y="4183380"/>
+            <a:ext cx="2396413" cy="960119"/>
+          </a:xfrm>
+          <a:prstGeom prst="rect">
+            <a:avLst/>
+          </a:prstGeom>
+          <a:noFill/>
+        </p:spPr>
+        <p:txBody>
+          <a:bodyPr wrap="square" anchor="t" lIns="0" rIns="0" tIns="0" bIns="0"/>
+          <a:lstStyle/>
+          <a:p>
+            <a:pPr algn="l"/>
+            <a:r>
+              <a:rPr sz="1800" b="0" i="0">
                 <a:solidFill>
                   <a:srgbClr val="202122"/>
                 </a:solidFill>
                 <a:latin typeface="Calibri"/>
               </a:rPr>
-              <a:t>Checklist fully used</a:t>
-            </a:r>
-          </a:p>
-          <a:p>
-            <a:pPr marL="274320" indent="-274320">
-              <a:spcAft>
-                <a:spcPts val="810"/>
-              </a:spcAft>
-              <a:buClr>
-                <a:srgbClr val="0645AD"/>
-              </a:buClr>
-              <a:buFont typeface="Arial"/>
-              <a:buChar char="•"/>
-            </a:pPr>
-            <a:r>
-              <a:rPr sz="1800" b="0">
-                <a:solidFill>
-                  <a:srgbClr val="202122"/>
-                </a:solidFill>
-                <a:latin typeface="Calibri"/>
-              </a:rPr>
-              <a:t>Feedback is constructive</a:t>
-            </a:r>
-          </a:p>
-          <a:p>
-            <a:pPr marL="274320" indent="-274320">
-              <a:spcAft>
-                <a:spcPts val="810"/>
-              </a:spcAft>
-              <a:buClr>
-                <a:srgbClr val="0645AD"/>
-              </a:buClr>
-              <a:buFont typeface="Arial"/>
-              <a:buChar char="•"/>
-            </a:pPr>
-            <a:r>
-              <a:rPr sz="1800" b="0">
-                <a:solidFill>
-                  <a:srgbClr val="202122"/>
-                </a:solidFill>
-                <a:latin typeface="Calibri"/>
-              </a:rPr>
-              <a:t>Corrections made</a:t>
+              <a:t>Drawings for quality, compliance and completeness.</a:t>
             </a:r>
           </a:p>
         </p:txBody>
@@ -8575,7 +10508,7 @@
     <p:bg>
       <p:bgPr>
         <a:solidFill>
-          <a:srgbClr val="03306E"/>
+          <a:srgbClr val="FFFFFF"/>
         </a:solidFill>
         <a:effectLst/>
       </p:bgPr>
@@ -8611,7 +10544,7 @@
             <a:r>
               <a:rPr sz="1100" b="1" i="0">
                 <a:solidFill>
-                  <a:srgbClr val="A9C8F0"/>
+                  <a:srgbClr val="54595D"/>
                 </a:solidFill>
                 <a:latin typeface="Calibri"/>
               </a:rPr>
@@ -8644,24 +10577,90 @@
             <a:r>
               <a:rPr sz="3200" b="1" i="0">
                 <a:solidFill>
-                  <a:srgbClr val="FFFFFF"/>
+                  <a:srgbClr val="03306E"/>
                 </a:solidFill>
                 <a:latin typeface="Cambria"/>
               </a:rPr>
-              <a:t>Exit ticket</a:t>
-            </a:r>
-          </a:p>
-        </p:txBody>
-      </p:sp>
-      <p:sp>
-        <p:nvSpPr>
-          <p:cNvPr id="4" name="Oval 3"/>
+              <a:t>Quick check: Testing and quality assuring</a:t>
+            </a:r>
+          </a:p>
+        </p:txBody>
+      </p:sp>
+      <p:sp>
+        <p:nvSpPr>
+          <p:cNvPr id="4" name="TextBox 3"/>
+          <p:cNvSpPr txBox="1"/>
+          <p:nvPr/>
+        </p:nvSpPr>
+        <p:spPr>
+          <a:xfrm>
+            <a:off x="548640" y="6446520"/>
+            <a:ext cx="8229600" cy="274320"/>
+          </a:xfrm>
+          <a:prstGeom prst="rect">
+            <a:avLst/>
+          </a:prstGeom>
+          <a:noFill/>
+        </p:spPr>
+        <p:txBody>
+          <a:bodyPr wrap="square" anchor="t" lIns="0" rIns="0" tIns="0" bIns="0"/>
+          <a:lstStyle/>
+          <a:p>
+            <a:pPr algn="l"/>
+            <a:r>
+              <a:rPr sz="1000" b="0" i="0">
+                <a:solidFill>
+                  <a:srgbClr val="54595D"/>
+                </a:solidFill>
+                <a:latin typeface="Calibri"/>
+              </a:rPr>
+              <a:t>Design and Development for Engineering and Manufacturing T Level  ·  Collaboration, Risk and Quality Assurance</a:t>
+            </a:r>
+          </a:p>
+        </p:txBody>
+      </p:sp>
+      <p:sp>
+        <p:nvSpPr>
+          <p:cNvPr id="5" name="TextBox 4"/>
+          <p:cNvSpPr txBox="1"/>
+          <p:nvPr/>
+        </p:nvSpPr>
+        <p:spPr>
+          <a:xfrm>
+            <a:off x="10728655" y="6446520"/>
+            <a:ext cx="914400" cy="274320"/>
+          </a:xfrm>
+          <a:prstGeom prst="rect">
+            <a:avLst/>
+          </a:prstGeom>
+          <a:noFill/>
+        </p:spPr>
+        <p:txBody>
+          <a:bodyPr wrap="square" anchor="t" lIns="0" rIns="0" tIns="0" bIns="0"/>
+          <a:lstStyle/>
+          <a:p>
+            <a:pPr algn="r"/>
+            <a:r>
+              <a:rPr sz="1000" b="0" i="0">
+                <a:solidFill>
+                  <a:srgbClr val="54595D"/>
+                </a:solidFill>
+                <a:latin typeface="Calibri"/>
+              </a:rPr>
+              <a:t>9</a:t>
+            </a:r>
+          </a:p>
+        </p:txBody>
+      </p:sp>
+      <p:sp>
+        <p:nvSpPr>
+          <p:cNvPr id="6" name="Oval 5"/>
           <p:cNvSpPr/>
           <p:nvPr/>
         </p:nvSpPr>
         <p:spPr>
           <a:xfrm>
-            <a:off x="548640" y="1737360"/>
+            <a:off x="548640" y="1691640"/>
             <a:ext cx="502920" cy="502920"/>
           </a:xfrm>
           <a:prstGeom prst="ellipse">
@@ -8695,7 +10694,7 @@
           <a:p>
             <a:pPr algn="ctr"/>
             <a:r>
-              <a:rPr sz="1700" b="1">
+              <a:rPr sz="1600" b="1">
                 <a:solidFill>
                   <a:srgbClr val="FFFFFF"/>
                 </a:solidFill>
@@ -8708,14 +10707,14 @@
       </p:sp>
       <p:sp>
         <p:nvSpPr>
-          <p:cNvPr id="5" name="TextBox 4"/>
+          <p:cNvPr id="7" name="TextBox 6"/>
           <p:cNvSpPr txBox="1"/>
           <p:nvPr/>
         </p:nvSpPr>
         <p:spPr>
           <a:xfrm>
-            <a:off x="1325880" y="1645920"/>
-            <a:ext cx="6583680" cy="822960"/>
+            <a:off x="1371600" y="1645920"/>
+            <a:ext cx="10271455" cy="1188720"/>
           </a:xfrm>
           <a:prstGeom prst="rect">
             <a:avLst/>
@@ -8723,31 +10722,31 @@
           <a:noFill/>
         </p:spPr>
         <p:txBody>
-          <a:bodyPr wrap="square" anchor="ctr" lIns="0" rIns="0" tIns="0" bIns="0"/>
+          <a:bodyPr wrap="square" anchor="t" lIns="0" rIns="0" tIns="0" bIns="0"/>
           <a:lstStyle/>
           <a:p>
             <a:pPr algn="l"/>
             <a:r>
-              <a:rPr sz="2000" b="0" i="0">
-                <a:solidFill>
-                  <a:srgbClr val="FFFFFF"/>
-                </a:solidFill>
-                <a:latin typeface="Calibri"/>
-              </a:rPr>
-              <a:t>Why do professional standards matter?</a:t>
-            </a:r>
-          </a:p>
-        </p:txBody>
-      </p:sp>
-      <p:sp>
-        <p:nvSpPr>
-          <p:cNvPr id="6" name="Oval 5"/>
+              <a:rPr sz="2400" b="0" i="0">
+                <a:solidFill>
+                  <a:srgbClr val="202122"/>
+                </a:solidFill>
+                <a:latin typeface="Calibri"/>
+              </a:rPr>
+              <a:t>Name two ways to test a prototype.</a:t>
+            </a:r>
+          </a:p>
+        </p:txBody>
+      </p:sp>
+      <p:sp>
+        <p:nvSpPr>
+          <p:cNvPr id="8" name="Oval 7"/>
           <p:cNvSpPr/>
           <p:nvPr/>
         </p:nvSpPr>
         <p:spPr>
           <a:xfrm>
-            <a:off x="548640" y="2697480"/>
+            <a:off x="548640" y="3108960"/>
             <a:ext cx="502920" cy="502920"/>
           </a:xfrm>
           <a:prstGeom prst="ellipse">
@@ -8781,7 +10780,7 @@
           <a:p>
             <a:pPr algn="ctr"/>
             <a:r>
-              <a:rPr sz="1700" b="1">
+              <a:rPr sz="1600" b="1">
                 <a:solidFill>
                   <a:srgbClr val="FFFFFF"/>
                 </a:solidFill>
@@ -8794,14 +10793,14 @@
       </p:sp>
       <p:sp>
         <p:nvSpPr>
-          <p:cNvPr id="7" name="TextBox 6"/>
+          <p:cNvPr id="9" name="TextBox 8"/>
           <p:cNvSpPr txBox="1"/>
           <p:nvPr/>
         </p:nvSpPr>
         <p:spPr>
           <a:xfrm>
-            <a:off x="1325880" y="2606040"/>
-            <a:ext cx="6583680" cy="822960"/>
+            <a:off x="1371600" y="3063240"/>
+            <a:ext cx="10271455" cy="1188720"/>
           </a:xfrm>
           <a:prstGeom prst="rect">
             <a:avLst/>
@@ -8809,31 +10808,31 @@
           <a:noFill/>
         </p:spPr>
         <p:txBody>
-          <a:bodyPr wrap="square" anchor="ctr" lIns="0" rIns="0" tIns="0" bIns="0"/>
+          <a:bodyPr wrap="square" anchor="t" lIns="0" rIns="0" tIns="0" bIns="0"/>
           <a:lstStyle/>
           <a:p>
             <a:pPr algn="l"/>
             <a:r>
-              <a:rPr sz="2000" b="0" i="0">
-                <a:solidFill>
-                  <a:srgbClr val="FFFFFF"/>
-                </a:solidFill>
-                <a:latin typeface="Calibri"/>
-              </a:rPr>
-              <a:t>What makes a good team member?</a:t>
-            </a:r>
-          </a:p>
-        </p:txBody>
-      </p:sp>
-      <p:sp>
-        <p:nvSpPr>
-          <p:cNvPr id="8" name="Oval 7"/>
+              <a:rPr sz="2400" b="0" i="0">
+                <a:solidFill>
+                  <a:srgbClr val="202122"/>
+                </a:solidFill>
+                <a:latin typeface="Calibri"/>
+              </a:rPr>
+              <a:t>What is a drawing checked for?</a:t>
+            </a:r>
+          </a:p>
+        </p:txBody>
+      </p:sp>
+      <p:sp>
+        <p:nvSpPr>
+          <p:cNvPr id="10" name="Oval 9"/>
           <p:cNvSpPr/>
           <p:nvPr/>
         </p:nvSpPr>
         <p:spPr>
           <a:xfrm>
-            <a:off x="548640" y="3657600"/>
+            <a:off x="548640" y="4526280"/>
             <a:ext cx="502920" cy="502920"/>
           </a:xfrm>
           <a:prstGeom prst="ellipse">
@@ -8867,7 +10866,7 @@
           <a:p>
             <a:pPr algn="ctr"/>
             <a:r>
-              <a:rPr sz="1700" b="1">
+              <a:rPr sz="1600" b="1">
                 <a:solidFill>
                   <a:srgbClr val="FFFFFF"/>
                 </a:solidFill>
@@ -8876,83 +10875,6 @@
               <a:t>3</a:t>
             </a:r>
           </a:p>
-        </p:txBody>
-      </p:sp>
-      <p:sp>
-        <p:nvSpPr>
-          <p:cNvPr id="9" name="TextBox 8"/>
-          <p:cNvSpPr txBox="1"/>
-          <p:nvPr/>
-        </p:nvSpPr>
-        <p:spPr>
-          <a:xfrm>
-            <a:off x="1325880" y="3566160"/>
-            <a:ext cx="6583680" cy="822960"/>
-          </a:xfrm>
-          <a:prstGeom prst="rect">
-            <a:avLst/>
-          </a:prstGeom>
-          <a:noFill/>
-        </p:spPr>
-        <p:txBody>
-          <a:bodyPr wrap="square" anchor="ctr" lIns="0" rIns="0" tIns="0" bIns="0"/>
-          <a:lstStyle/>
-          <a:p>
-            <a:pPr algn="l"/>
-            <a:r>
-              <a:rPr sz="2000" b="0" i="0">
-                <a:solidFill>
-                  <a:srgbClr val="FFFFFF"/>
-                </a:solidFill>
-                <a:latin typeface="Calibri"/>
-              </a:rPr>
-              <a:t>Name a high-power application risk.</a:t>
-            </a:r>
-          </a:p>
-        </p:txBody>
-      </p:sp>
-      <p:sp>
-        <p:nvSpPr>
-          <p:cNvPr id="10" name="Rounded Rectangle 9"/>
-          <p:cNvSpPr/>
-          <p:nvPr/>
-        </p:nvSpPr>
-        <p:spPr>
-          <a:xfrm>
-            <a:off x="8229600" y="1645920"/>
-            <a:ext cx="3410712" cy="2926080"/>
-          </a:xfrm>
-          <a:prstGeom prst="roundRect">
-            <a:avLst>
-              <a:gd name="adj" fmla="val 8000"/>
-            </a:avLst>
-          </a:prstGeom>
-          <a:solidFill>
-            <a:srgbClr val="0645AD"/>
-          </a:solidFill>
-          <a:ln>
-            <a:noFill/>
-          </a:ln>
-          <a:effectLst/>
-        </p:spPr>
-        <p:style>
-          <a:lnRef idx="1">
-            <a:schemeClr val="accent1"/>
-          </a:lnRef>
-          <a:fillRef idx="3">
-            <a:schemeClr val="accent1"/>
-          </a:fillRef>
-          <a:effectRef idx="2">
-            <a:schemeClr val="accent1"/>
-          </a:effectRef>
-          <a:fontRef idx="minor">
-            <a:schemeClr val="lt1"/>
-          </a:fontRef>
-        </p:style>
-        <p:txBody>
-          <a:bodyPr rtlCol="0" anchor="ctr"/>
-          <a:lstStyle/>
-          <a:p/>
         </p:txBody>
       </p:sp>
       <p:sp>
@@ -8963,8 +10885,8 @@
         </p:nvSpPr>
         <p:spPr>
           <a:xfrm>
-            <a:off x="8503920" y="1874519"/>
-            <a:ext cx="2926080" cy="365760"/>
+            <a:off x="1371600" y="4480560"/>
+            <a:ext cx="10271455" cy="1188720"/>
           </a:xfrm>
           <a:prstGeom prst="rect">
             <a:avLst/>
@@ -8977,13 +10899,13 @@
           <a:p>
             <a:pPr algn="l"/>
             <a:r>
-              <a:rPr sz="1300" b="1" i="0">
-                <a:solidFill>
-                  <a:srgbClr val="A9C8F0"/>
-                </a:solidFill>
-                <a:latin typeface="Calibri"/>
-              </a:rPr>
-              <a:t>REVISE THIS TOPIC</a:t>
+              <a:rPr sz="2400" b="0" i="0">
+                <a:solidFill>
+                  <a:srgbClr val="202122"/>
+                </a:solidFill>
+                <a:latin typeface="Calibri"/>
+              </a:rPr>
+              <a:t>Name a professional engineering body.</a:t>
             </a:r>
           </a:p>
         </p:txBody>
@@ -8996,8 +10918,8 @@
         </p:nvSpPr>
         <p:spPr>
           <a:xfrm>
-            <a:off x="8503920" y="2286000"/>
-            <a:ext cx="2926080" cy="548640"/>
+            <a:off x="548640" y="5852160"/>
+            <a:ext cx="11094415" cy="365760"/>
           </a:xfrm>
           <a:prstGeom prst="rect">
             <a:avLst/>
@@ -9010,79 +10932,13 @@
           <a:p>
             <a:pPr algn="l"/>
             <a:r>
-              <a:rPr sz="1400" b="0" i="0">
-                <a:solidFill>
-                  <a:srgbClr val="FFFFFF"/>
-                </a:solidFill>
-                <a:latin typeface="Calibri"/>
-              </a:rPr>
-              <a:t>Revision notes for this lesson are on the study wiki:</a:t>
-            </a:r>
-          </a:p>
-        </p:txBody>
-      </p:sp>
-      <p:sp>
-        <p:nvSpPr>
-          <p:cNvPr id="13" name="TextBox 12"/>
-          <p:cNvSpPr txBox="1"/>
-          <p:nvPr/>
-        </p:nvSpPr>
-        <p:spPr>
-          <a:xfrm>
-            <a:off x="8503920" y="2926080"/>
-            <a:ext cx="2926080" cy="1463040"/>
-          </a:xfrm>
-          <a:prstGeom prst="rect">
-            <a:avLst/>
-          </a:prstGeom>
-          <a:noFill/>
-        </p:spPr>
-        <p:txBody>
-          <a:bodyPr wrap="square" anchor="t" lIns="0" rIns="0" tIns="0" bIns="0"/>
-          <a:lstStyle/>
-          <a:p>
-            <a:pPr algn="l"/>
-            <a:r>
-              <a:rPr sz="2000" b="1" i="0">
-                <a:solidFill>
-                  <a:srgbClr val="FFFFFF"/>
-                </a:solidFill>
-                <a:latin typeface="Cambria"/>
-              </a:rPr>
-              <a:t>Practical Criteria</a:t>
-            </a:r>
-          </a:p>
-        </p:txBody>
-      </p:sp>
-      <p:sp>
-        <p:nvSpPr>
-          <p:cNvPr id="14" name="TextBox 13"/>
-          <p:cNvSpPr txBox="1"/>
-          <p:nvPr/>
-        </p:nvSpPr>
-        <p:spPr>
-          <a:xfrm>
-            <a:off x="548640" y="5669280"/>
-            <a:ext cx="11094415" cy="548640"/>
-          </a:xfrm>
-          <a:prstGeom prst="rect">
-            <a:avLst/>
-          </a:prstGeom>
-          <a:noFill/>
-        </p:spPr>
-        <p:txBody>
-          <a:bodyPr wrap="square" anchor="t" lIns="0" rIns="0" tIns="0" bIns="0"/>
-          <a:lstStyle/>
-          <a:p>
-            <a:pPr algn="l"/>
-            <a:r>
-              <a:rPr sz="1200" b="0" i="0">
-                <a:solidFill>
-                  <a:srgbClr val="A9C8F0"/>
-                </a:solidFill>
-                <a:latin typeface="Calibri"/>
-              </a:rPr>
-              <a:t>https://lana6478.github.io/T-level-Design-Development-Engineering-Manufacturing/#/02-occupational-specialism/02-practical-criteria.md</a:t>
+              <a:rPr sz="1300" b="0" i="1">
+                <a:solidFill>
+                  <a:srgbClr val="54595D"/>
+                </a:solidFill>
+                <a:latin typeface="Calibri"/>
+              </a:rPr>
+              <a:t>Answer on mini whiteboards or in your book. Answers are in the speaker notes.</a:t>
             </a:r>
           </a:p>
         </p:txBody>
